--- a/docs/tech/ezApprovalG/전자결재연동/전자결재 연동 개발 가이드 문서.pptx
+++ b/docs/tech/ezApprovalG/전자결재연동/전자결재 연동 개발 가이드 문서.pptx
@@ -23,15 +23,16 @@
     <p:sldId id="270" r:id="rId17"/>
     <p:sldId id="279" r:id="rId18"/>
     <p:sldId id="271" r:id="rId19"/>
-    <p:sldId id="278" r:id="rId20"/>
-    <p:sldId id="280" r:id="rId21"/>
-    <p:sldId id="281" r:id="rId22"/>
-    <p:sldId id="282" r:id="rId23"/>
-    <p:sldId id="283" r:id="rId24"/>
-    <p:sldId id="272" r:id="rId25"/>
-    <p:sldId id="273" r:id="rId26"/>
-    <p:sldId id="275" r:id="rId27"/>
-    <p:sldId id="276" r:id="rId28"/>
+    <p:sldId id="284" r:id="rId20"/>
+    <p:sldId id="278" r:id="rId21"/>
+    <p:sldId id="280" r:id="rId22"/>
+    <p:sldId id="281" r:id="rId23"/>
+    <p:sldId id="282" r:id="rId24"/>
+    <p:sldId id="283" r:id="rId25"/>
+    <p:sldId id="272" r:id="rId26"/>
+    <p:sldId id="273" r:id="rId27"/>
+    <p:sldId id="275" r:id="rId28"/>
+    <p:sldId id="276" r:id="rId29"/>
   </p:sldIdLst>
   <p:sldSz cx="12192000" cy="6858000"/>
   <p:notesSz cx="6858000" cy="9144000"/>
@@ -173,6 +174,11 @@
             <p14:sldId id="270"/>
             <p14:sldId id="279"/>
             <p14:sldId id="271"/>
+          </p14:sldIdLst>
+        </p14:section>
+        <p14:section name="XSLT 연동" id="{0EB87AF9-E8E7-4C2B-8285-EE5570DBDCAB}">
+          <p14:sldIdLst>
+            <p14:sldId id="284"/>
           </p14:sldIdLst>
         </p14:section>
         <p14:section name="전자결재 창 연동" id="{1B72027D-D788-4C25-8788-0F5D053766C1}">
@@ -7102,52 +7108,6 @@
           <a:chExt cx="0" cy="0"/>
         </a:xfrm>
       </p:grpSpPr>
-      <p:sp>
-        <p:nvSpPr>
-          <p:cNvPr id="5" name="TextBox 4"/>
-          <p:cNvSpPr txBox="1"/>
-          <p:nvPr/>
-        </p:nvSpPr>
-        <p:spPr>
-          <a:xfrm>
-            <a:off x="557213" y="473320"/>
-            <a:ext cx="2919389" cy="400110"/>
-          </a:xfrm>
-          <a:prstGeom prst="rect">
-            <a:avLst/>
-          </a:prstGeom>
-          <a:noFill/>
-        </p:spPr>
-        <p:txBody>
-          <a:bodyPr wrap="none" rtlCol="0">
-            <a:spAutoFit/>
-          </a:bodyPr>
-          <a:lstStyle/>
-          <a:p>
-            <a:r>
-              <a:rPr lang="ko-KR" altLang="en-US" sz="2000" b="1" dirty="0" smtClean="0">
-                <a:latin typeface="+mj-lt"/>
-              </a:rPr>
-              <a:t>연동 </a:t>
-            </a:r>
-            <a:r>
-              <a:rPr lang="en-US" altLang="ko-KR" sz="2000" b="1" dirty="0" smtClean="0">
-                <a:latin typeface="+mj-lt"/>
-              </a:rPr>
-              <a:t>: </a:t>
-            </a:r>
-            <a:r>
-              <a:rPr lang="ko-KR" altLang="en-US" sz="2000" b="1" dirty="0" smtClean="0">
-                <a:latin typeface="+mj-lt"/>
-              </a:rPr>
-              <a:t>전자결재 창 오픈</a:t>
-            </a:r>
-            <a:endParaRPr lang="ko-KR" altLang="en-US" sz="2000" b="1" dirty="0">
-              <a:latin typeface="+mj-lt"/>
-            </a:endParaRPr>
-          </a:p>
-        </p:txBody>
-      </p:sp>
       <p:pic>
         <p:nvPicPr>
           <p:cNvPr id="2" name="그림 1"/>
@@ -7164,8 +7124,8 @@
         </p:blipFill>
         <p:spPr>
           <a:xfrm>
-            <a:off x="557213" y="4347751"/>
-            <a:ext cx="11062243" cy="312149"/>
+            <a:off x="557213" y="1227084"/>
+            <a:ext cx="10564699" cy="3515216"/>
           </a:xfrm>
           <a:prstGeom prst="rect">
             <a:avLst/>
@@ -7174,14 +7134,14 @@
       </p:pic>
       <p:sp>
         <p:nvSpPr>
-          <p:cNvPr id="6" name="TextBox 5"/>
+          <p:cNvPr id="5" name="TextBox 4"/>
           <p:cNvSpPr txBox="1"/>
           <p:nvPr/>
         </p:nvSpPr>
         <p:spPr>
           <a:xfrm>
-            <a:off x="709613" y="1379484"/>
-            <a:ext cx="11033425" cy="2462213"/>
+            <a:off x="557213" y="473320"/>
+            <a:ext cx="1364220" cy="400110"/>
           </a:xfrm>
           <a:prstGeom prst="rect">
             <a:avLst/>
@@ -7189,376 +7149,39 @@
           <a:noFill/>
         </p:spPr>
         <p:txBody>
-          <a:bodyPr wrap="square" rtlCol="0">
+          <a:bodyPr wrap="none" rtlCol="0">
             <a:spAutoFit/>
           </a:bodyPr>
           <a:lstStyle/>
           <a:p>
-            <a:pPr marL="285750" indent="-285750">
-              <a:buFont typeface="Arial" panose="020B0604020202020204" pitchFamily="34" charset="0"/>
-              <a:buChar char="•"/>
-            </a:pPr>
-            <a:r>
-              <a:rPr lang="ko-KR" altLang="en-US" sz="1400" dirty="0" smtClean="0"/>
-              <a:t>외부에서 그룹웨어 </a:t>
-            </a:r>
-            <a:r>
-              <a:rPr lang="ko-KR" altLang="en-US" sz="1400" dirty="0" err="1" smtClean="0"/>
-              <a:t>기안창</a:t>
-            </a:r>
-            <a:r>
-              <a:rPr lang="ko-KR" altLang="en-US" sz="1400" dirty="0" smtClean="0"/>
-              <a:t> 혹은 </a:t>
-            </a:r>
-            <a:r>
-              <a:rPr lang="ko-KR" altLang="en-US" sz="1400" dirty="0" err="1" smtClean="0"/>
-              <a:t>결재창을</a:t>
-            </a:r>
-            <a:r>
-              <a:rPr lang="ko-KR" altLang="en-US" sz="1400" dirty="0" smtClean="0"/>
-              <a:t> 오픈한다</a:t>
-            </a:r>
-            <a:r>
-              <a:rPr lang="en-US" altLang="ko-KR" sz="1400" dirty="0" smtClean="0"/>
-              <a:t>. </a:t>
-            </a:r>
-          </a:p>
-          <a:p>
-            <a:pPr marL="285750" indent="-285750">
-              <a:buFont typeface="Arial" panose="020B0604020202020204" pitchFamily="34" charset="0"/>
-              <a:buChar char="•"/>
-            </a:pPr>
-            <a:r>
-              <a:rPr lang="ko-KR" altLang="en-US" sz="1400" dirty="0" err="1" smtClean="0"/>
-              <a:t>구현방법</a:t>
-            </a:r>
-            <a:endParaRPr lang="en-US" altLang="ko-KR" sz="1400" dirty="0" smtClean="0"/>
-          </a:p>
-          <a:p>
-            <a:pPr marL="342900" indent="-342900">
-              <a:buFont typeface="+mj-lt"/>
-              <a:buAutoNum type="arabicPeriod"/>
-            </a:pPr>
-            <a:r>
-              <a:rPr lang="ko-KR" altLang="en-US" sz="1400" dirty="0" err="1" smtClean="0"/>
-              <a:t>인터셉터를</a:t>
-            </a:r>
-            <a:r>
-              <a:rPr lang="ko-KR" altLang="en-US" sz="1400" dirty="0" smtClean="0"/>
-              <a:t> 타지 않는 </a:t>
-            </a:r>
-            <a:r>
-              <a:rPr lang="en-US" altLang="ko-KR" sz="1400" dirty="0" smtClean="0"/>
-              <a:t>/</a:t>
-            </a:r>
-            <a:r>
-              <a:rPr lang="en-US" altLang="ko-KR" sz="1400" dirty="0" err="1" smtClean="0"/>
-              <a:t>ezConn</a:t>
-            </a:r>
-            <a:r>
-              <a:rPr lang="en-US" altLang="ko-KR" sz="1400" dirty="0" smtClean="0"/>
-              <a:t>/~</a:t>
-            </a:r>
-            <a:r>
-              <a:rPr lang="ko-KR" altLang="en-US" sz="1400" dirty="0" smtClean="0"/>
-              <a:t>을 </a:t>
-            </a:r>
-            <a:r>
-              <a:rPr lang="en-US" altLang="ko-KR" sz="1400" dirty="0" err="1" smtClean="0"/>
-              <a:t>url</a:t>
-            </a:r>
-            <a:r>
-              <a:rPr lang="ko-KR" altLang="en-US" sz="1400" dirty="0" smtClean="0"/>
-              <a:t>로 하는 컨트롤러 생성</a:t>
-            </a:r>
-            <a:r>
-              <a:rPr lang="en-US" altLang="ko-KR" sz="1400" dirty="0" smtClean="0"/>
-              <a:t>, </a:t>
-            </a:r>
-            <a:r>
-              <a:rPr lang="en-US" altLang="ko-KR" sz="1400" dirty="0" err="1" smtClean="0"/>
-              <a:t>connKey</a:t>
-            </a:r>
-            <a:r>
-              <a:rPr lang="en-US" altLang="ko-KR" sz="1400" dirty="0" smtClean="0"/>
-              <a:t>(</a:t>
-            </a:r>
-            <a:r>
-              <a:rPr lang="ko-KR" altLang="en-US" sz="1400" dirty="0" err="1" smtClean="0"/>
-              <a:t>연동키</a:t>
-            </a:r>
-            <a:r>
-              <a:rPr lang="en-US" altLang="ko-KR" sz="1400" dirty="0" smtClean="0"/>
-              <a:t>)</a:t>
-            </a:r>
-            <a:r>
-              <a:rPr lang="ko-KR" altLang="en-US" sz="1400" dirty="0" smtClean="0"/>
-              <a:t>와 </a:t>
-            </a:r>
-            <a:r>
-              <a:rPr lang="en-US" altLang="ko-KR" sz="1400" dirty="0" err="1" smtClean="0"/>
-              <a:t>connFormCode</a:t>
-            </a:r>
-            <a:r>
-              <a:rPr lang="ko-KR" altLang="en-US" sz="1400" dirty="0" smtClean="0"/>
-              <a:t>를 </a:t>
-            </a:r>
-            <a:r>
-              <a:rPr lang="ko-KR" altLang="en-US" sz="1400" dirty="0" err="1" smtClean="0"/>
-              <a:t>파라미터로</a:t>
-            </a:r>
-            <a:r>
-              <a:rPr lang="ko-KR" altLang="en-US" sz="1400" dirty="0" smtClean="0"/>
-              <a:t> 받는다</a:t>
-            </a:r>
-            <a:r>
-              <a:rPr lang="en-US" altLang="ko-KR" sz="1400" dirty="0" smtClean="0"/>
-              <a:t>.</a:t>
-            </a:r>
-          </a:p>
-          <a:p>
-            <a:pPr marL="342900" indent="-342900">
-              <a:buFont typeface="+mj-lt"/>
-              <a:buAutoNum type="arabicPeriod"/>
-            </a:pPr>
-            <a:r>
-              <a:rPr lang="en-US" altLang="ko-KR" sz="1400" dirty="0" err="1" smtClean="0"/>
-              <a:t>connKey</a:t>
-            </a:r>
-            <a:r>
-              <a:rPr lang="ko-KR" altLang="en-US" sz="1400" dirty="0" smtClean="0"/>
-              <a:t>로 </a:t>
-            </a:r>
-            <a:r>
-              <a:rPr lang="en-US" altLang="ko-KR" sz="1400" dirty="0" err="1" smtClean="0"/>
-              <a:t>docID</a:t>
-            </a:r>
-            <a:r>
-              <a:rPr lang="ko-KR" altLang="en-US" sz="1400" dirty="0" smtClean="0"/>
-              <a:t>를 얻는다</a:t>
-            </a:r>
-            <a:r>
-              <a:rPr lang="en-US" altLang="ko-KR" sz="1400" dirty="0" smtClean="0"/>
-              <a:t>. (</a:t>
-            </a:r>
-            <a:r>
-              <a:rPr lang="ko-KR" altLang="en-US" sz="1400" dirty="0" smtClean="0"/>
-              <a:t>보통 연동</a:t>
-            </a:r>
-            <a:r>
-              <a:rPr lang="en-US" altLang="ko-KR" sz="1400" dirty="0" smtClean="0"/>
-              <a:t>DB</a:t>
-            </a:r>
-            <a:r>
-              <a:rPr lang="ko-KR" altLang="en-US" sz="1400" dirty="0" smtClean="0"/>
-              <a:t>에 저장되어있음</a:t>
-            </a:r>
-            <a:r>
-              <a:rPr lang="en-US" altLang="ko-KR" sz="1400" dirty="0" smtClean="0"/>
-              <a:t>. </a:t>
-            </a:r>
-            <a:r>
-              <a:rPr lang="ko-KR" altLang="en-US" sz="1400" dirty="0" smtClean="0"/>
-              <a:t>저장되어있는 곳이 없다면 </a:t>
-            </a:r>
-            <a:r>
-              <a:rPr lang="ko-KR" altLang="en-US" sz="1400" dirty="0" err="1" smtClean="0"/>
-              <a:t>연동키</a:t>
-            </a:r>
-            <a:r>
-              <a:rPr lang="en-US" altLang="ko-KR" sz="1400" dirty="0" smtClean="0"/>
-              <a:t>-</a:t>
-            </a:r>
-            <a:r>
-              <a:rPr lang="ko-KR" altLang="en-US" sz="1400" dirty="0" err="1" smtClean="0"/>
-              <a:t>문서아이디</a:t>
-            </a:r>
-            <a:r>
-              <a:rPr lang="ko-KR" altLang="en-US" sz="1400" dirty="0" smtClean="0"/>
-              <a:t> 정보가 있는 테이블 생성 필요</a:t>
-            </a:r>
-            <a:r>
-              <a:rPr lang="en-US" altLang="ko-KR" sz="1400" dirty="0" smtClean="0"/>
-              <a:t>)</a:t>
-            </a:r>
-          </a:p>
-          <a:p>
-            <a:pPr marL="342900" indent="-342900">
-              <a:buFont typeface="+mj-lt"/>
-              <a:buAutoNum type="arabicPeriod"/>
-            </a:pPr>
-            <a:r>
-              <a:rPr lang="ko-KR" altLang="en-US" sz="1400" dirty="0" smtClean="0"/>
-              <a:t>해당 문서가 상신 되지 않은 문서인지 진행 문서인지 완료 문서인지 체크한다</a:t>
-            </a:r>
-            <a:r>
-              <a:rPr lang="en-US" altLang="ko-KR" sz="1400" dirty="0" smtClean="0"/>
-              <a:t>. </a:t>
-            </a:r>
-          </a:p>
-          <a:p>
-            <a:pPr marL="342900" indent="-342900">
-              <a:buFont typeface="+mj-lt"/>
-              <a:buAutoNum type="arabicPeriod"/>
-            </a:pPr>
-            <a:r>
-              <a:rPr lang="ko-KR" altLang="en-US" sz="1400" dirty="0" smtClean="0"/>
-              <a:t>체크한 값에 따른 </a:t>
-            </a:r>
-            <a:r>
-              <a:rPr lang="en-US" altLang="ko-KR" sz="1400" dirty="0" smtClean="0"/>
-              <a:t>URL</a:t>
-            </a:r>
-            <a:r>
-              <a:rPr lang="ko-KR" altLang="en-US" sz="1400" dirty="0" smtClean="0"/>
-              <a:t>을 생성한다</a:t>
-            </a:r>
-            <a:r>
-              <a:rPr lang="en-US" altLang="ko-KR" sz="1400" dirty="0" smtClean="0"/>
-              <a:t>.</a:t>
-            </a:r>
-          </a:p>
-          <a:p>
-            <a:pPr marL="800100" lvl="1" indent="-342900">
-              <a:buFont typeface="Arial" panose="020B0604020202020204" pitchFamily="34" charset="0"/>
-              <a:buChar char="•"/>
-            </a:pPr>
-            <a:r>
-              <a:rPr lang="ko-KR" altLang="en-US" sz="1400" dirty="0" err="1" smtClean="0"/>
-              <a:t>기안창을</a:t>
-            </a:r>
-            <a:r>
-              <a:rPr lang="ko-KR" altLang="en-US" sz="1400" dirty="0" smtClean="0"/>
-              <a:t> 호출하는 경우 일반적으로 </a:t>
-            </a:r>
-            <a:r>
-              <a:rPr lang="en-US" altLang="ko-KR" sz="1400" dirty="0" smtClean="0"/>
-              <a:t>INIT</a:t>
-            </a:r>
-            <a:r>
-              <a:rPr lang="ko-KR" altLang="en-US" sz="1400" dirty="0" smtClean="0"/>
-              <a:t>시점 연동을 실행하면서 </a:t>
-            </a:r>
-            <a:r>
-              <a:rPr lang="en-US" altLang="ko-KR" sz="1400" dirty="0" err="1" smtClean="0"/>
-              <a:t>connKey</a:t>
-            </a:r>
-            <a:r>
-              <a:rPr lang="ko-KR" altLang="en-US" sz="1400" dirty="0" smtClean="0"/>
-              <a:t>로 데이터를 불러온다</a:t>
-            </a:r>
-            <a:r>
-              <a:rPr lang="en-US" altLang="ko-KR" sz="1400" dirty="0" smtClean="0"/>
-              <a:t>. </a:t>
-            </a:r>
-            <a:br>
-              <a:rPr lang="en-US" altLang="ko-KR" sz="1400" dirty="0" smtClean="0"/>
-            </a:br>
-            <a:r>
-              <a:rPr lang="ko-KR" altLang="en-US" sz="1400" dirty="0" smtClean="0"/>
-              <a:t>그렇기 때문에 </a:t>
-            </a:r>
-            <a:r>
-              <a:rPr lang="ko-KR" altLang="en-US" sz="1400" dirty="0" err="1" smtClean="0"/>
-              <a:t>기안창</a:t>
-            </a:r>
-            <a:r>
-              <a:rPr lang="ko-KR" altLang="en-US" sz="1400" dirty="0" smtClean="0"/>
-              <a:t> </a:t>
-            </a:r>
-            <a:r>
-              <a:rPr lang="ko-KR" altLang="en-US" sz="1400" dirty="0" err="1" smtClean="0"/>
-              <a:t>호출시에</a:t>
-            </a:r>
-            <a:r>
-              <a:rPr lang="ko-KR" altLang="en-US" sz="1400" dirty="0" smtClean="0"/>
-              <a:t> </a:t>
-            </a:r>
-            <a:r>
-              <a:rPr lang="en-US" altLang="ko-KR" sz="1400" dirty="0" smtClean="0"/>
-              <a:t>URL</a:t>
-            </a:r>
-            <a:r>
-              <a:rPr lang="ko-KR" altLang="en-US" sz="1400" dirty="0" smtClean="0"/>
-              <a:t>에 </a:t>
-            </a:r>
-            <a:r>
-              <a:rPr lang="en-US" altLang="ko-KR" sz="1400" dirty="0" err="1" smtClean="0"/>
-              <a:t>connKey</a:t>
-            </a:r>
-            <a:r>
-              <a:rPr lang="en-US" altLang="ko-KR" sz="1400" dirty="0" smtClean="0"/>
-              <a:t> </a:t>
-            </a:r>
-            <a:r>
-              <a:rPr lang="ko-KR" altLang="en-US" sz="1400" dirty="0" err="1" smtClean="0"/>
-              <a:t>파라미터를</a:t>
-            </a:r>
-            <a:r>
-              <a:rPr lang="ko-KR" altLang="en-US" sz="1400" dirty="0" smtClean="0"/>
-              <a:t> 추가하여야 한다</a:t>
-            </a:r>
-            <a:r>
-              <a:rPr lang="en-US" altLang="ko-KR" sz="1400" dirty="0" smtClean="0"/>
-              <a:t>.</a:t>
-            </a:r>
-          </a:p>
-          <a:p>
-            <a:pPr marL="342900" indent="-342900">
-              <a:buFont typeface="+mj-lt"/>
-              <a:buAutoNum type="arabicPeriod"/>
-            </a:pPr>
-            <a:r>
-              <a:rPr lang="ko-KR" altLang="en-US" sz="1400" dirty="0" smtClean="0"/>
-              <a:t>유저 인증을 하고 생성한 </a:t>
-            </a:r>
-            <a:r>
-              <a:rPr lang="en-US" altLang="ko-KR" sz="1400" dirty="0" smtClean="0"/>
-              <a:t>URL</a:t>
-            </a:r>
-            <a:r>
-              <a:rPr lang="ko-KR" altLang="en-US" sz="1400" dirty="0" smtClean="0"/>
-              <a:t>로 리다이렉트한다</a:t>
-            </a:r>
-            <a:r>
-              <a:rPr lang="en-US" altLang="ko-KR" sz="1400" dirty="0" smtClean="0"/>
-              <a:t>.</a:t>
-            </a:r>
-          </a:p>
-          <a:p>
-            <a:pPr marL="742950" lvl="1" indent="-285750">
-              <a:buFont typeface="Arial" panose="020B0604020202020204" pitchFamily="34" charset="0"/>
-              <a:buChar char="•"/>
-            </a:pPr>
-            <a:r>
-              <a:rPr lang="ko-KR" altLang="en-US" sz="1400" dirty="0" smtClean="0"/>
-              <a:t>유저 정보를 받아오는 방법은 사이트마다 모두 상이하기 때문에 각 사이트 결재 연동 </a:t>
-            </a:r>
-            <a:r>
-              <a:rPr lang="ko-KR" altLang="en-US" sz="1400" dirty="0" err="1" smtClean="0"/>
-              <a:t>기획안을</a:t>
-            </a:r>
-            <a:r>
-              <a:rPr lang="ko-KR" altLang="en-US" sz="1400" dirty="0" smtClean="0"/>
-              <a:t> 참고하여 구현한다</a:t>
-            </a:r>
-            <a:r>
-              <a:rPr lang="en-US" altLang="ko-KR" sz="1400" dirty="0" smtClean="0"/>
-              <a:t>.</a:t>
-            </a:r>
-          </a:p>
-        </p:txBody>
-      </p:sp>
-      <p:sp>
-        <p:nvSpPr>
-          <p:cNvPr id="8" name="TextBox 7"/>
+            <a:r>
+              <a:rPr lang="en-US" altLang="ko-KR" sz="2000" b="1" dirty="0" smtClean="0">
+                <a:latin typeface="+mj-lt"/>
+              </a:rPr>
+              <a:t>XSLT </a:t>
+            </a:r>
+            <a:r>
+              <a:rPr lang="ko-KR" altLang="en-US" sz="2000" b="1" dirty="0" smtClean="0">
+                <a:latin typeface="+mj-lt"/>
+              </a:rPr>
+              <a:t>연동</a:t>
+            </a:r>
+            <a:endParaRPr lang="ko-KR" altLang="en-US" sz="2000" b="1" dirty="0">
+              <a:latin typeface="+mj-lt"/>
+            </a:endParaRPr>
+          </a:p>
+        </p:txBody>
+      </p:sp>
+      <p:sp>
+        <p:nvSpPr>
+          <p:cNvPr id="11" name="TextBox 10"/>
           <p:cNvSpPr txBox="1"/>
           <p:nvPr/>
         </p:nvSpPr>
         <p:spPr>
           <a:xfrm>
-            <a:off x="586031" y="4659900"/>
-            <a:ext cx="11033425" cy="523220"/>
+            <a:off x="557213" y="4742300"/>
+            <a:ext cx="7452874" cy="1384995"/>
           </a:xfrm>
           <a:prstGeom prst="rect">
             <a:avLst/>
@@ -7566,173 +7189,199 @@
           <a:noFill/>
         </p:spPr>
         <p:txBody>
-          <a:bodyPr wrap="square" rtlCol="0">
+          <a:bodyPr wrap="none" rtlCol="0">
             <a:spAutoFit/>
           </a:bodyPr>
           <a:lstStyle/>
           <a:p>
-            <a:pPr marL="285750" indent="-285750">
-              <a:buFont typeface="Arial" panose="020B0604020202020204" pitchFamily="34" charset="0"/>
-              <a:buChar char="•"/>
+            <a:r>
+              <a:rPr lang="en-US" altLang="ko-KR" sz="1400" dirty="0" smtClean="0"/>
+              <a:t>XSLT</a:t>
+            </a:r>
+            <a:r>
+              <a:rPr lang="ko-KR" altLang="en-US" sz="1400" dirty="0" smtClean="0"/>
+              <a:t>란</a:t>
+            </a:r>
+            <a:r>
+              <a:rPr lang="en-US" altLang="ko-KR" sz="1400" dirty="0"/>
+              <a:t> </a:t>
+            </a:r>
+            <a:r>
+              <a:rPr lang="en-US" altLang="ko-KR" sz="1400" dirty="0" smtClean="0"/>
+              <a:t>XSL</a:t>
+            </a:r>
+            <a:r>
+              <a:rPr lang="ko-KR" altLang="en-US" sz="1400" dirty="0" smtClean="0"/>
+              <a:t>언어를 이용해 </a:t>
+            </a:r>
+            <a:r>
+              <a:rPr lang="en-US" altLang="ko-KR" sz="1400" dirty="0" smtClean="0"/>
+              <a:t>XML</a:t>
+            </a:r>
+            <a:r>
+              <a:rPr lang="ko-KR" altLang="en-US" sz="1400" dirty="0" smtClean="0"/>
+              <a:t>을 </a:t>
+            </a:r>
+            <a:r>
+              <a:rPr lang="en-US" altLang="ko-KR" sz="1400" dirty="0" smtClean="0"/>
+              <a:t>HTML</a:t>
+            </a:r>
+            <a:r>
+              <a:rPr lang="ko-KR" altLang="en-US" sz="1400" dirty="0" smtClean="0"/>
+              <a:t>형식으로 변환하는 것이다</a:t>
+            </a:r>
+            <a:r>
+              <a:rPr lang="en-US" altLang="ko-KR" sz="1400" dirty="0" smtClean="0"/>
+              <a:t>. </a:t>
+            </a:r>
+          </a:p>
+          <a:p>
+            <a:r>
+              <a:rPr lang="ko-KR" altLang="en-US" sz="1400" dirty="0" smtClean="0"/>
+              <a:t>양식 작성 시 </a:t>
+            </a:r>
+            <a:r>
+              <a:rPr lang="en-US" altLang="ko-KR" sz="1400" dirty="0" smtClean="0"/>
+              <a:t>XSLT </a:t>
+            </a:r>
+            <a:r>
+              <a:rPr lang="ko-KR" altLang="en-US" sz="1400" dirty="0" smtClean="0"/>
+              <a:t>탭에서 변환 결과를 테스트하여 볼 수 있다</a:t>
+            </a:r>
+            <a:r>
+              <a:rPr lang="en-US" altLang="ko-KR" sz="1400" dirty="0" smtClean="0"/>
+              <a:t>. </a:t>
+            </a:r>
+          </a:p>
+          <a:p>
+            <a:endParaRPr lang="en-US" altLang="ko-KR" sz="1400" dirty="0" smtClean="0"/>
+          </a:p>
+          <a:p>
+            <a:pPr marL="342900" indent="-342900">
+              <a:buAutoNum type="arabicPeriod"/>
             </a:pPr>
             <a:r>
+              <a:rPr lang="ko-KR" altLang="en-US" sz="1400" dirty="0" smtClean="0"/>
+              <a:t>양식에 </a:t>
+            </a:r>
+            <a:r>
+              <a:rPr lang="en-US" altLang="ko-KR" sz="1400" dirty="0" smtClean="0"/>
+              <a:t>XSLT</a:t>
+            </a:r>
+            <a:r>
+              <a:rPr lang="ko-KR" altLang="en-US" sz="1400" dirty="0" smtClean="0"/>
+              <a:t>를 저장하면 </a:t>
+            </a:r>
+            <a:r>
               <a:rPr lang="en-US" altLang="ko-KR" sz="1400" dirty="0" err="1" smtClean="0"/>
-              <a:t>connKey</a:t>
-            </a:r>
-            <a:r>
-              <a:rPr lang="en-US" altLang="ko-KR" sz="1400" dirty="0" smtClean="0"/>
-              <a:t> : </a:t>
-            </a:r>
-            <a:r>
-              <a:rPr lang="ko-KR" altLang="en-US" sz="1400" dirty="0" smtClean="0"/>
-              <a:t>연동 정보</a:t>
-            </a:r>
-            <a:r>
-              <a:rPr lang="en-US" altLang="ko-KR" sz="1400" dirty="0" smtClean="0"/>
-              <a:t>, </a:t>
-            </a:r>
-            <a:r>
-              <a:rPr lang="ko-KR" altLang="en-US" sz="1400" dirty="0" smtClean="0"/>
-              <a:t>문서 정보를 얻기 위해 필요함</a:t>
+              <a:t>tbl_forminfo</a:t>
+            </a:r>
+            <a:r>
+              <a:rPr lang="ko-KR" altLang="en-US" sz="1400" dirty="0" smtClean="0"/>
+              <a:t>테이블 </a:t>
+            </a:r>
+            <a:r>
+              <a:rPr lang="en-US" altLang="ko-KR" sz="1400" dirty="0" err="1" smtClean="0"/>
+              <a:t>formxslt</a:t>
+            </a:r>
+            <a:r>
+              <a:rPr lang="ko-KR" altLang="en-US" sz="1400" dirty="0" smtClean="0"/>
+              <a:t>컬럼에 </a:t>
+            </a:r>
+            <a:r>
+              <a:rPr lang="en-US" altLang="ko-KR" sz="1400" dirty="0" smtClean="0"/>
+              <a:t>XSL </a:t>
+            </a:r>
+            <a:r>
+              <a:rPr lang="ko-KR" altLang="en-US" sz="1400" dirty="0" smtClean="0"/>
+              <a:t>내용이 저장된다</a:t>
+            </a:r>
+            <a:r>
+              <a:rPr lang="en-US" altLang="ko-KR" sz="1400" dirty="0" smtClean="0"/>
+              <a:t>.</a:t>
+            </a:r>
+          </a:p>
+          <a:p>
+            <a:pPr marL="342900" indent="-342900">
+              <a:buAutoNum type="arabicPeriod"/>
+            </a:pPr>
+            <a:r>
+              <a:rPr lang="en-US" altLang="ko-KR" sz="1400" dirty="0" smtClean="0"/>
+              <a:t>XML</a:t>
+            </a:r>
+            <a:r>
+              <a:rPr lang="ko-KR" altLang="en-US" sz="1400" dirty="0" smtClean="0"/>
+              <a:t>형식의 연동데이터를 변환한다</a:t>
+            </a:r>
+            <a:r>
+              <a:rPr lang="en-US" altLang="ko-KR" sz="1400" dirty="0" smtClean="0"/>
+              <a:t>. (</a:t>
+            </a:r>
+            <a:r>
+              <a:rPr lang="en-US" altLang="ko-KR" sz="1400" dirty="0"/>
+              <a:t>CommonUtil.java </a:t>
+            </a:r>
+            <a:r>
+              <a:rPr lang="en-US" altLang="ko-KR" sz="1400" dirty="0" err="1" smtClean="0"/>
+              <a:t>convertXsltToHtml</a:t>
+            </a:r>
+            <a:r>
+              <a:rPr lang="ko-KR" altLang="en-US" sz="1400" dirty="0" err="1" smtClean="0"/>
+              <a:t>메소드</a:t>
+            </a:r>
+            <a:r>
+              <a:rPr lang="ko-KR" altLang="en-US" sz="1400" dirty="0" smtClean="0"/>
+              <a:t> 사용</a:t>
+            </a:r>
+            <a:r>
+              <a:rPr lang="en-US" altLang="ko-KR" sz="1400" dirty="0" smtClean="0"/>
+              <a:t>)</a:t>
+            </a:r>
+          </a:p>
+          <a:p>
+            <a:pPr marL="342900" indent="-342900">
+              <a:buAutoNum type="arabicPeriod"/>
+            </a:pPr>
+            <a:r>
+              <a:rPr lang="ko-KR" altLang="en-US" sz="1400" dirty="0" smtClean="0"/>
+              <a:t>변환된 </a:t>
+            </a:r>
+            <a:r>
+              <a:rPr lang="en-US" altLang="ko-KR" sz="1400" dirty="0" smtClean="0"/>
+              <a:t>HTML</a:t>
+            </a:r>
+            <a:r>
+              <a:rPr lang="ko-KR" altLang="en-US" sz="1400" dirty="0" smtClean="0"/>
+              <a:t>을 </a:t>
+            </a:r>
+            <a:r>
+              <a:rPr lang="ko-KR" altLang="en-US" sz="1400" dirty="0" err="1" smtClean="0"/>
+              <a:t>리턴데이터</a:t>
+            </a:r>
+            <a:r>
+              <a:rPr lang="ko-KR" altLang="en-US" sz="1400" dirty="0" smtClean="0"/>
+              <a:t> </a:t>
+            </a:r>
+            <a:r>
+              <a:rPr lang="en-US" altLang="ko-KR" sz="1400" dirty="0" smtClean="0"/>
+              <a:t>HTML=Y</a:t>
+            </a:r>
+            <a:r>
+              <a:rPr lang="ko-KR" altLang="en-US" sz="1400" dirty="0" smtClean="0"/>
+              <a:t>로 하여 전달한다</a:t>
+            </a:r>
+            <a:r>
+              <a:rPr lang="en-US" altLang="ko-KR" sz="1400" dirty="0" smtClean="0"/>
+              <a:t>.</a:t>
             </a:r>
             <a:endParaRPr lang="en-US" altLang="ko-KR" sz="1400" dirty="0" smtClean="0"/>
-          </a:p>
-          <a:p>
-            <a:pPr marL="285750" indent="-285750">
-              <a:buFont typeface="Arial" panose="020B0604020202020204" pitchFamily="34" charset="0"/>
-              <a:buChar char="•"/>
-            </a:pPr>
-            <a:r>
-              <a:rPr lang="en-US" altLang="ko-KR" sz="1400" dirty="0" err="1" smtClean="0"/>
-              <a:t>connFormCode</a:t>
-            </a:r>
-            <a:r>
-              <a:rPr lang="en-US" altLang="ko-KR" sz="1400" dirty="0" smtClean="0"/>
-              <a:t> : </a:t>
-            </a:r>
-            <a:r>
-              <a:rPr lang="ko-KR" altLang="en-US" sz="1400" dirty="0" smtClean="0"/>
-              <a:t>양식 정보를 얻기 위해 필요함 </a:t>
-            </a:r>
-            <a:r>
-              <a:rPr lang="en-US" altLang="ko-KR" sz="1400" dirty="0" smtClean="0"/>
-              <a:t>(</a:t>
-            </a:r>
-            <a:r>
-              <a:rPr lang="ko-KR" altLang="en-US" sz="1400" dirty="0" smtClean="0"/>
-              <a:t>기안 시 양식 정보가 있어야 </a:t>
-            </a:r>
-            <a:r>
-              <a:rPr lang="en-US" altLang="ko-KR" sz="1400" dirty="0" smtClean="0"/>
-              <a:t>URL </a:t>
-            </a:r>
-            <a:r>
-              <a:rPr lang="ko-KR" altLang="en-US" sz="1400" dirty="0" smtClean="0"/>
-              <a:t>생성 가능</a:t>
-            </a:r>
-            <a:r>
-              <a:rPr lang="en-US" altLang="ko-KR" sz="1400" dirty="0" smtClean="0"/>
-              <a:t>)</a:t>
-            </a:r>
-          </a:p>
-        </p:txBody>
-      </p:sp>
-      <p:sp>
-        <p:nvSpPr>
-          <p:cNvPr id="9" name="직사각형 8"/>
-          <p:cNvSpPr/>
-          <p:nvPr/>
-        </p:nvSpPr>
-        <p:spPr>
-          <a:xfrm>
-            <a:off x="3319849" y="4469400"/>
-            <a:ext cx="1037967" cy="190500"/>
-          </a:xfrm>
-          <a:prstGeom prst="rect">
-            <a:avLst/>
-          </a:prstGeom>
-          <a:noFill/>
-          <a:ln w="38100">
-            <a:solidFill>
-              <a:srgbClr val="FF0000"/>
-            </a:solidFill>
-          </a:ln>
-        </p:spPr>
-        <p:style>
-          <a:lnRef idx="2">
-            <a:schemeClr val="accent1">
-              <a:shade val="50000"/>
-            </a:schemeClr>
-          </a:lnRef>
-          <a:fillRef idx="1">
-            <a:schemeClr val="accent1"/>
-          </a:fillRef>
-          <a:effectRef idx="0">
-            <a:schemeClr val="accent1"/>
-          </a:effectRef>
-          <a:fontRef idx="minor">
-            <a:schemeClr val="lt1"/>
-          </a:fontRef>
-        </p:style>
-        <p:txBody>
-          <a:bodyPr rtlCol="0" anchor="ctr"/>
-          <a:lstStyle/>
-          <a:p>
-            <a:pPr algn="ctr"/>
-            <a:endParaRPr lang="ko-KR" altLang="en-US"/>
-          </a:p>
-        </p:txBody>
-      </p:sp>
-      <p:sp>
-        <p:nvSpPr>
-          <p:cNvPr id="10" name="직사각형 9"/>
-          <p:cNvSpPr/>
-          <p:nvPr/>
-        </p:nvSpPr>
-        <p:spPr>
-          <a:xfrm>
-            <a:off x="7875373" y="4469400"/>
-            <a:ext cx="1400432" cy="190500"/>
-          </a:xfrm>
-          <a:prstGeom prst="rect">
-            <a:avLst/>
-          </a:prstGeom>
-          <a:noFill/>
-          <a:ln w="38100">
-            <a:solidFill>
-              <a:srgbClr val="FF0000"/>
-            </a:solidFill>
-          </a:ln>
-        </p:spPr>
-        <p:style>
-          <a:lnRef idx="2">
-            <a:schemeClr val="accent1">
-              <a:shade val="50000"/>
-            </a:schemeClr>
-          </a:lnRef>
-          <a:fillRef idx="1">
-            <a:schemeClr val="accent1"/>
-          </a:fillRef>
-          <a:effectRef idx="0">
-            <a:schemeClr val="accent1"/>
-          </a:effectRef>
-          <a:fontRef idx="minor">
-            <a:schemeClr val="lt1"/>
-          </a:fontRef>
-        </p:style>
-        <p:txBody>
-          <a:bodyPr rtlCol="0" anchor="ctr"/>
-          <a:lstStyle/>
-          <a:p>
-            <a:pPr algn="ctr"/>
-            <a:endParaRPr lang="ko-KR" altLang="en-US"/>
           </a:p>
         </p:txBody>
       </p:sp>
     </p:spTree>
     <p:extLst>
       <p:ext uri="{BB962C8B-B14F-4D97-AF65-F5344CB8AC3E}">
-        <p14:creationId xmlns:p14="http://schemas.microsoft.com/office/powerpoint/2010/main" val="3272489549"/>
+        <p14:creationId xmlns:p14="http://schemas.microsoft.com/office/powerpoint/2010/main" val="2162120729"/>
       </p:ext>
     </p:extLst>
   </p:cSld>
@@ -8387,6 +8036,663 @@
           </a:p>
         </p:txBody>
       </p:sp>
+      <p:pic>
+        <p:nvPicPr>
+          <p:cNvPr id="2" name="그림 1"/>
+          <p:cNvPicPr>
+            <a:picLocks noChangeAspect="1"/>
+          </p:cNvPicPr>
+          <p:nvPr/>
+        </p:nvPicPr>
+        <p:blipFill>
+          <a:blip r:embed="rId2"/>
+          <a:stretch>
+            <a:fillRect/>
+          </a:stretch>
+        </p:blipFill>
+        <p:spPr>
+          <a:xfrm>
+            <a:off x="557213" y="4347751"/>
+            <a:ext cx="11062243" cy="312149"/>
+          </a:xfrm>
+          <a:prstGeom prst="rect">
+            <a:avLst/>
+          </a:prstGeom>
+        </p:spPr>
+      </p:pic>
+      <p:sp>
+        <p:nvSpPr>
+          <p:cNvPr id="6" name="TextBox 5"/>
+          <p:cNvSpPr txBox="1"/>
+          <p:nvPr/>
+        </p:nvSpPr>
+        <p:spPr>
+          <a:xfrm>
+            <a:off x="709613" y="1379484"/>
+            <a:ext cx="11033425" cy="2462213"/>
+          </a:xfrm>
+          <a:prstGeom prst="rect">
+            <a:avLst/>
+          </a:prstGeom>
+          <a:noFill/>
+        </p:spPr>
+        <p:txBody>
+          <a:bodyPr wrap="square" rtlCol="0">
+            <a:spAutoFit/>
+          </a:bodyPr>
+          <a:lstStyle/>
+          <a:p>
+            <a:pPr marL="285750" indent="-285750">
+              <a:buFont typeface="Arial" panose="020B0604020202020204" pitchFamily="34" charset="0"/>
+              <a:buChar char="•"/>
+            </a:pPr>
+            <a:r>
+              <a:rPr lang="ko-KR" altLang="en-US" sz="1400" dirty="0" smtClean="0"/>
+              <a:t>외부에서 그룹웨어 </a:t>
+            </a:r>
+            <a:r>
+              <a:rPr lang="ko-KR" altLang="en-US" sz="1400" dirty="0" err="1" smtClean="0"/>
+              <a:t>기안창</a:t>
+            </a:r>
+            <a:r>
+              <a:rPr lang="ko-KR" altLang="en-US" sz="1400" dirty="0" smtClean="0"/>
+              <a:t> 혹은 </a:t>
+            </a:r>
+            <a:r>
+              <a:rPr lang="ko-KR" altLang="en-US" sz="1400" dirty="0" err="1" smtClean="0"/>
+              <a:t>결재창을</a:t>
+            </a:r>
+            <a:r>
+              <a:rPr lang="ko-KR" altLang="en-US" sz="1400" dirty="0" smtClean="0"/>
+              <a:t> 오픈한다</a:t>
+            </a:r>
+            <a:r>
+              <a:rPr lang="en-US" altLang="ko-KR" sz="1400" dirty="0" smtClean="0"/>
+              <a:t>. </a:t>
+            </a:r>
+          </a:p>
+          <a:p>
+            <a:pPr marL="285750" indent="-285750">
+              <a:buFont typeface="Arial" panose="020B0604020202020204" pitchFamily="34" charset="0"/>
+              <a:buChar char="•"/>
+            </a:pPr>
+            <a:r>
+              <a:rPr lang="ko-KR" altLang="en-US" sz="1400" dirty="0" err="1" smtClean="0"/>
+              <a:t>구현방법</a:t>
+            </a:r>
+            <a:endParaRPr lang="en-US" altLang="ko-KR" sz="1400" dirty="0" smtClean="0"/>
+          </a:p>
+          <a:p>
+            <a:pPr marL="342900" indent="-342900">
+              <a:buFont typeface="+mj-lt"/>
+              <a:buAutoNum type="arabicPeriod"/>
+            </a:pPr>
+            <a:r>
+              <a:rPr lang="ko-KR" altLang="en-US" sz="1400" dirty="0" err="1" smtClean="0"/>
+              <a:t>인터셉터를</a:t>
+            </a:r>
+            <a:r>
+              <a:rPr lang="ko-KR" altLang="en-US" sz="1400" dirty="0" smtClean="0"/>
+              <a:t> 타지 않는 </a:t>
+            </a:r>
+            <a:r>
+              <a:rPr lang="en-US" altLang="ko-KR" sz="1400" dirty="0" smtClean="0"/>
+              <a:t>/</a:t>
+            </a:r>
+            <a:r>
+              <a:rPr lang="en-US" altLang="ko-KR" sz="1400" dirty="0" err="1" smtClean="0"/>
+              <a:t>ezConn</a:t>
+            </a:r>
+            <a:r>
+              <a:rPr lang="en-US" altLang="ko-KR" sz="1400" dirty="0" smtClean="0"/>
+              <a:t>/~</a:t>
+            </a:r>
+            <a:r>
+              <a:rPr lang="ko-KR" altLang="en-US" sz="1400" dirty="0" smtClean="0"/>
+              <a:t>을 </a:t>
+            </a:r>
+            <a:r>
+              <a:rPr lang="en-US" altLang="ko-KR" sz="1400" dirty="0" err="1" smtClean="0"/>
+              <a:t>url</a:t>
+            </a:r>
+            <a:r>
+              <a:rPr lang="ko-KR" altLang="en-US" sz="1400" dirty="0" smtClean="0"/>
+              <a:t>로 하는 컨트롤러 생성</a:t>
+            </a:r>
+            <a:r>
+              <a:rPr lang="en-US" altLang="ko-KR" sz="1400" dirty="0" smtClean="0"/>
+              <a:t>, </a:t>
+            </a:r>
+            <a:r>
+              <a:rPr lang="en-US" altLang="ko-KR" sz="1400" dirty="0" err="1" smtClean="0"/>
+              <a:t>connKey</a:t>
+            </a:r>
+            <a:r>
+              <a:rPr lang="en-US" altLang="ko-KR" sz="1400" dirty="0" smtClean="0"/>
+              <a:t>(</a:t>
+            </a:r>
+            <a:r>
+              <a:rPr lang="ko-KR" altLang="en-US" sz="1400" dirty="0" err="1" smtClean="0"/>
+              <a:t>연동키</a:t>
+            </a:r>
+            <a:r>
+              <a:rPr lang="en-US" altLang="ko-KR" sz="1400" dirty="0" smtClean="0"/>
+              <a:t>)</a:t>
+            </a:r>
+            <a:r>
+              <a:rPr lang="ko-KR" altLang="en-US" sz="1400" dirty="0" smtClean="0"/>
+              <a:t>와 </a:t>
+            </a:r>
+            <a:r>
+              <a:rPr lang="en-US" altLang="ko-KR" sz="1400" dirty="0" err="1" smtClean="0"/>
+              <a:t>connFormCode</a:t>
+            </a:r>
+            <a:r>
+              <a:rPr lang="ko-KR" altLang="en-US" sz="1400" dirty="0" smtClean="0"/>
+              <a:t>를 </a:t>
+            </a:r>
+            <a:r>
+              <a:rPr lang="ko-KR" altLang="en-US" sz="1400" dirty="0" err="1" smtClean="0"/>
+              <a:t>파라미터로</a:t>
+            </a:r>
+            <a:r>
+              <a:rPr lang="ko-KR" altLang="en-US" sz="1400" dirty="0" smtClean="0"/>
+              <a:t> 받는다</a:t>
+            </a:r>
+            <a:r>
+              <a:rPr lang="en-US" altLang="ko-KR" sz="1400" dirty="0" smtClean="0"/>
+              <a:t>.</a:t>
+            </a:r>
+          </a:p>
+          <a:p>
+            <a:pPr marL="342900" indent="-342900">
+              <a:buFont typeface="+mj-lt"/>
+              <a:buAutoNum type="arabicPeriod"/>
+            </a:pPr>
+            <a:r>
+              <a:rPr lang="en-US" altLang="ko-KR" sz="1400" dirty="0" err="1" smtClean="0"/>
+              <a:t>connKey</a:t>
+            </a:r>
+            <a:r>
+              <a:rPr lang="ko-KR" altLang="en-US" sz="1400" dirty="0" smtClean="0"/>
+              <a:t>로 </a:t>
+            </a:r>
+            <a:r>
+              <a:rPr lang="en-US" altLang="ko-KR" sz="1400" dirty="0" err="1" smtClean="0"/>
+              <a:t>docID</a:t>
+            </a:r>
+            <a:r>
+              <a:rPr lang="ko-KR" altLang="en-US" sz="1400" dirty="0" smtClean="0"/>
+              <a:t>를 얻는다</a:t>
+            </a:r>
+            <a:r>
+              <a:rPr lang="en-US" altLang="ko-KR" sz="1400" dirty="0" smtClean="0"/>
+              <a:t>. (</a:t>
+            </a:r>
+            <a:r>
+              <a:rPr lang="ko-KR" altLang="en-US" sz="1400" dirty="0" smtClean="0"/>
+              <a:t>보통 연동</a:t>
+            </a:r>
+            <a:r>
+              <a:rPr lang="en-US" altLang="ko-KR" sz="1400" dirty="0" smtClean="0"/>
+              <a:t>DB</a:t>
+            </a:r>
+            <a:r>
+              <a:rPr lang="ko-KR" altLang="en-US" sz="1400" dirty="0" smtClean="0"/>
+              <a:t>에 저장되어있음</a:t>
+            </a:r>
+            <a:r>
+              <a:rPr lang="en-US" altLang="ko-KR" sz="1400" dirty="0" smtClean="0"/>
+              <a:t>. </a:t>
+            </a:r>
+            <a:r>
+              <a:rPr lang="ko-KR" altLang="en-US" sz="1400" dirty="0" smtClean="0"/>
+              <a:t>저장되어있는 곳이 없다면 </a:t>
+            </a:r>
+            <a:r>
+              <a:rPr lang="ko-KR" altLang="en-US" sz="1400" dirty="0" err="1" smtClean="0"/>
+              <a:t>연동키</a:t>
+            </a:r>
+            <a:r>
+              <a:rPr lang="en-US" altLang="ko-KR" sz="1400" dirty="0" smtClean="0"/>
+              <a:t>-</a:t>
+            </a:r>
+            <a:r>
+              <a:rPr lang="ko-KR" altLang="en-US" sz="1400" dirty="0" err="1" smtClean="0"/>
+              <a:t>문서아이디</a:t>
+            </a:r>
+            <a:r>
+              <a:rPr lang="ko-KR" altLang="en-US" sz="1400" dirty="0" smtClean="0"/>
+              <a:t> 정보가 있는 테이블 생성 필요</a:t>
+            </a:r>
+            <a:r>
+              <a:rPr lang="en-US" altLang="ko-KR" sz="1400" dirty="0" smtClean="0"/>
+              <a:t>)</a:t>
+            </a:r>
+          </a:p>
+          <a:p>
+            <a:pPr marL="342900" indent="-342900">
+              <a:buFont typeface="+mj-lt"/>
+              <a:buAutoNum type="arabicPeriod"/>
+            </a:pPr>
+            <a:r>
+              <a:rPr lang="ko-KR" altLang="en-US" sz="1400" dirty="0" smtClean="0"/>
+              <a:t>해당 문서가 상신 되지 않은 문서인지 진행 문서인지 완료 문서인지 체크한다</a:t>
+            </a:r>
+            <a:r>
+              <a:rPr lang="en-US" altLang="ko-KR" sz="1400" dirty="0" smtClean="0"/>
+              <a:t>. </a:t>
+            </a:r>
+          </a:p>
+          <a:p>
+            <a:pPr marL="342900" indent="-342900">
+              <a:buFont typeface="+mj-lt"/>
+              <a:buAutoNum type="arabicPeriod"/>
+            </a:pPr>
+            <a:r>
+              <a:rPr lang="ko-KR" altLang="en-US" sz="1400" dirty="0" smtClean="0"/>
+              <a:t>체크한 값에 따른 </a:t>
+            </a:r>
+            <a:r>
+              <a:rPr lang="en-US" altLang="ko-KR" sz="1400" dirty="0" smtClean="0"/>
+              <a:t>URL</a:t>
+            </a:r>
+            <a:r>
+              <a:rPr lang="ko-KR" altLang="en-US" sz="1400" dirty="0" smtClean="0"/>
+              <a:t>을 생성한다</a:t>
+            </a:r>
+            <a:r>
+              <a:rPr lang="en-US" altLang="ko-KR" sz="1400" dirty="0" smtClean="0"/>
+              <a:t>.</a:t>
+            </a:r>
+          </a:p>
+          <a:p>
+            <a:pPr marL="800100" lvl="1" indent="-342900">
+              <a:buFont typeface="Arial" panose="020B0604020202020204" pitchFamily="34" charset="0"/>
+              <a:buChar char="•"/>
+            </a:pPr>
+            <a:r>
+              <a:rPr lang="ko-KR" altLang="en-US" sz="1400" dirty="0" err="1" smtClean="0"/>
+              <a:t>기안창을</a:t>
+            </a:r>
+            <a:r>
+              <a:rPr lang="ko-KR" altLang="en-US" sz="1400" dirty="0" smtClean="0"/>
+              <a:t> 호출하는 경우 일반적으로 </a:t>
+            </a:r>
+            <a:r>
+              <a:rPr lang="en-US" altLang="ko-KR" sz="1400" dirty="0" smtClean="0"/>
+              <a:t>INIT</a:t>
+            </a:r>
+            <a:r>
+              <a:rPr lang="ko-KR" altLang="en-US" sz="1400" dirty="0" smtClean="0"/>
+              <a:t>시점 연동을 실행하면서 </a:t>
+            </a:r>
+            <a:r>
+              <a:rPr lang="en-US" altLang="ko-KR" sz="1400" dirty="0" err="1" smtClean="0"/>
+              <a:t>connKey</a:t>
+            </a:r>
+            <a:r>
+              <a:rPr lang="ko-KR" altLang="en-US" sz="1400" dirty="0" smtClean="0"/>
+              <a:t>로 데이터를 불러온다</a:t>
+            </a:r>
+            <a:r>
+              <a:rPr lang="en-US" altLang="ko-KR" sz="1400" dirty="0" smtClean="0"/>
+              <a:t>. </a:t>
+            </a:r>
+            <a:br>
+              <a:rPr lang="en-US" altLang="ko-KR" sz="1400" dirty="0" smtClean="0"/>
+            </a:br>
+            <a:r>
+              <a:rPr lang="ko-KR" altLang="en-US" sz="1400" dirty="0" smtClean="0"/>
+              <a:t>그렇기 때문에 </a:t>
+            </a:r>
+            <a:r>
+              <a:rPr lang="ko-KR" altLang="en-US" sz="1400" dirty="0" err="1" smtClean="0"/>
+              <a:t>기안창</a:t>
+            </a:r>
+            <a:r>
+              <a:rPr lang="ko-KR" altLang="en-US" sz="1400" dirty="0" smtClean="0"/>
+              <a:t> </a:t>
+            </a:r>
+            <a:r>
+              <a:rPr lang="ko-KR" altLang="en-US" sz="1400" dirty="0" err="1" smtClean="0"/>
+              <a:t>호출시에</a:t>
+            </a:r>
+            <a:r>
+              <a:rPr lang="ko-KR" altLang="en-US" sz="1400" dirty="0" smtClean="0"/>
+              <a:t> </a:t>
+            </a:r>
+            <a:r>
+              <a:rPr lang="en-US" altLang="ko-KR" sz="1400" dirty="0" smtClean="0"/>
+              <a:t>URL</a:t>
+            </a:r>
+            <a:r>
+              <a:rPr lang="ko-KR" altLang="en-US" sz="1400" dirty="0" smtClean="0"/>
+              <a:t>에 </a:t>
+            </a:r>
+            <a:r>
+              <a:rPr lang="en-US" altLang="ko-KR" sz="1400" dirty="0" err="1" smtClean="0"/>
+              <a:t>connKey</a:t>
+            </a:r>
+            <a:r>
+              <a:rPr lang="en-US" altLang="ko-KR" sz="1400" dirty="0" smtClean="0"/>
+              <a:t> </a:t>
+            </a:r>
+            <a:r>
+              <a:rPr lang="ko-KR" altLang="en-US" sz="1400" dirty="0" err="1" smtClean="0"/>
+              <a:t>파라미터를</a:t>
+            </a:r>
+            <a:r>
+              <a:rPr lang="ko-KR" altLang="en-US" sz="1400" dirty="0" smtClean="0"/>
+              <a:t> 추가하여야 한다</a:t>
+            </a:r>
+            <a:r>
+              <a:rPr lang="en-US" altLang="ko-KR" sz="1400" dirty="0" smtClean="0"/>
+              <a:t>.</a:t>
+            </a:r>
+          </a:p>
+          <a:p>
+            <a:pPr marL="342900" indent="-342900">
+              <a:buFont typeface="+mj-lt"/>
+              <a:buAutoNum type="arabicPeriod"/>
+            </a:pPr>
+            <a:r>
+              <a:rPr lang="ko-KR" altLang="en-US" sz="1400" dirty="0" smtClean="0"/>
+              <a:t>유저 인증을 하고 생성한 </a:t>
+            </a:r>
+            <a:r>
+              <a:rPr lang="en-US" altLang="ko-KR" sz="1400" dirty="0" smtClean="0"/>
+              <a:t>URL</a:t>
+            </a:r>
+            <a:r>
+              <a:rPr lang="ko-KR" altLang="en-US" sz="1400" dirty="0" smtClean="0"/>
+              <a:t>로 리다이렉트한다</a:t>
+            </a:r>
+            <a:r>
+              <a:rPr lang="en-US" altLang="ko-KR" sz="1400" dirty="0" smtClean="0"/>
+              <a:t>.</a:t>
+            </a:r>
+          </a:p>
+          <a:p>
+            <a:pPr marL="742950" lvl="1" indent="-285750">
+              <a:buFont typeface="Arial" panose="020B0604020202020204" pitchFamily="34" charset="0"/>
+              <a:buChar char="•"/>
+            </a:pPr>
+            <a:r>
+              <a:rPr lang="ko-KR" altLang="en-US" sz="1400" dirty="0" smtClean="0"/>
+              <a:t>유저 정보를 받아오는 방법은 사이트마다 모두 상이하기 때문에 각 사이트 결재 연동 </a:t>
+            </a:r>
+            <a:r>
+              <a:rPr lang="ko-KR" altLang="en-US" sz="1400" dirty="0" err="1" smtClean="0"/>
+              <a:t>기획안을</a:t>
+            </a:r>
+            <a:r>
+              <a:rPr lang="ko-KR" altLang="en-US" sz="1400" dirty="0" smtClean="0"/>
+              <a:t> 참고하여 구현한다</a:t>
+            </a:r>
+            <a:r>
+              <a:rPr lang="en-US" altLang="ko-KR" sz="1400" dirty="0" smtClean="0"/>
+              <a:t>.</a:t>
+            </a:r>
+          </a:p>
+        </p:txBody>
+      </p:sp>
+      <p:sp>
+        <p:nvSpPr>
+          <p:cNvPr id="8" name="TextBox 7"/>
+          <p:cNvSpPr txBox="1"/>
+          <p:nvPr/>
+        </p:nvSpPr>
+        <p:spPr>
+          <a:xfrm>
+            <a:off x="586031" y="4659900"/>
+            <a:ext cx="11033425" cy="523220"/>
+          </a:xfrm>
+          <a:prstGeom prst="rect">
+            <a:avLst/>
+          </a:prstGeom>
+          <a:noFill/>
+        </p:spPr>
+        <p:txBody>
+          <a:bodyPr wrap="square" rtlCol="0">
+            <a:spAutoFit/>
+          </a:bodyPr>
+          <a:lstStyle/>
+          <a:p>
+            <a:pPr marL="285750" indent="-285750">
+              <a:buFont typeface="Arial" panose="020B0604020202020204" pitchFamily="34" charset="0"/>
+              <a:buChar char="•"/>
+            </a:pPr>
+            <a:r>
+              <a:rPr lang="en-US" altLang="ko-KR" sz="1400" dirty="0" err="1" smtClean="0"/>
+              <a:t>connKey</a:t>
+            </a:r>
+            <a:r>
+              <a:rPr lang="en-US" altLang="ko-KR" sz="1400" dirty="0" smtClean="0"/>
+              <a:t> : </a:t>
+            </a:r>
+            <a:r>
+              <a:rPr lang="ko-KR" altLang="en-US" sz="1400" dirty="0" smtClean="0"/>
+              <a:t>연동 정보</a:t>
+            </a:r>
+            <a:r>
+              <a:rPr lang="en-US" altLang="ko-KR" sz="1400" dirty="0" smtClean="0"/>
+              <a:t>, </a:t>
+            </a:r>
+            <a:r>
+              <a:rPr lang="ko-KR" altLang="en-US" sz="1400" dirty="0" smtClean="0"/>
+              <a:t>문서 정보를 얻기 위해 필요함</a:t>
+            </a:r>
+            <a:endParaRPr lang="en-US" altLang="ko-KR" sz="1400" dirty="0" smtClean="0"/>
+          </a:p>
+          <a:p>
+            <a:pPr marL="285750" indent="-285750">
+              <a:buFont typeface="Arial" panose="020B0604020202020204" pitchFamily="34" charset="0"/>
+              <a:buChar char="•"/>
+            </a:pPr>
+            <a:r>
+              <a:rPr lang="en-US" altLang="ko-KR" sz="1400" dirty="0" err="1" smtClean="0"/>
+              <a:t>connFormCode</a:t>
+            </a:r>
+            <a:r>
+              <a:rPr lang="en-US" altLang="ko-KR" sz="1400" dirty="0" smtClean="0"/>
+              <a:t> : </a:t>
+            </a:r>
+            <a:r>
+              <a:rPr lang="ko-KR" altLang="en-US" sz="1400" dirty="0" smtClean="0"/>
+              <a:t>양식 정보를 얻기 위해 필요함 </a:t>
+            </a:r>
+            <a:r>
+              <a:rPr lang="en-US" altLang="ko-KR" sz="1400" dirty="0" smtClean="0"/>
+              <a:t>(</a:t>
+            </a:r>
+            <a:r>
+              <a:rPr lang="ko-KR" altLang="en-US" sz="1400" dirty="0" smtClean="0"/>
+              <a:t>기안 시 양식 정보가 있어야 </a:t>
+            </a:r>
+            <a:r>
+              <a:rPr lang="en-US" altLang="ko-KR" sz="1400" dirty="0" smtClean="0"/>
+              <a:t>URL </a:t>
+            </a:r>
+            <a:r>
+              <a:rPr lang="ko-KR" altLang="en-US" sz="1400" dirty="0" smtClean="0"/>
+              <a:t>생성 가능</a:t>
+            </a:r>
+            <a:r>
+              <a:rPr lang="en-US" altLang="ko-KR" sz="1400" dirty="0" smtClean="0"/>
+              <a:t>)</a:t>
+            </a:r>
+          </a:p>
+        </p:txBody>
+      </p:sp>
+      <p:sp>
+        <p:nvSpPr>
+          <p:cNvPr id="9" name="직사각형 8"/>
+          <p:cNvSpPr/>
+          <p:nvPr/>
+        </p:nvSpPr>
+        <p:spPr>
+          <a:xfrm>
+            <a:off x="3319849" y="4469400"/>
+            <a:ext cx="1037967" cy="190500"/>
+          </a:xfrm>
+          <a:prstGeom prst="rect">
+            <a:avLst/>
+          </a:prstGeom>
+          <a:noFill/>
+          <a:ln w="38100">
+            <a:solidFill>
+              <a:srgbClr val="FF0000"/>
+            </a:solidFill>
+          </a:ln>
+        </p:spPr>
+        <p:style>
+          <a:lnRef idx="2">
+            <a:schemeClr val="accent1">
+              <a:shade val="50000"/>
+            </a:schemeClr>
+          </a:lnRef>
+          <a:fillRef idx="1">
+            <a:schemeClr val="accent1"/>
+          </a:fillRef>
+          <a:effectRef idx="0">
+            <a:schemeClr val="accent1"/>
+          </a:effectRef>
+          <a:fontRef idx="minor">
+            <a:schemeClr val="lt1"/>
+          </a:fontRef>
+        </p:style>
+        <p:txBody>
+          <a:bodyPr rtlCol="0" anchor="ctr"/>
+          <a:lstStyle/>
+          <a:p>
+            <a:pPr algn="ctr"/>
+            <a:endParaRPr lang="ko-KR" altLang="en-US"/>
+          </a:p>
+        </p:txBody>
+      </p:sp>
+      <p:sp>
+        <p:nvSpPr>
+          <p:cNvPr id="10" name="직사각형 9"/>
+          <p:cNvSpPr/>
+          <p:nvPr/>
+        </p:nvSpPr>
+        <p:spPr>
+          <a:xfrm>
+            <a:off x="7875373" y="4469400"/>
+            <a:ext cx="1400432" cy="190500"/>
+          </a:xfrm>
+          <a:prstGeom prst="rect">
+            <a:avLst/>
+          </a:prstGeom>
+          <a:noFill/>
+          <a:ln w="38100">
+            <a:solidFill>
+              <a:srgbClr val="FF0000"/>
+            </a:solidFill>
+          </a:ln>
+        </p:spPr>
+        <p:style>
+          <a:lnRef idx="2">
+            <a:schemeClr val="accent1">
+              <a:shade val="50000"/>
+            </a:schemeClr>
+          </a:lnRef>
+          <a:fillRef idx="1">
+            <a:schemeClr val="accent1"/>
+          </a:fillRef>
+          <a:effectRef idx="0">
+            <a:schemeClr val="accent1"/>
+          </a:effectRef>
+          <a:fontRef idx="minor">
+            <a:schemeClr val="lt1"/>
+          </a:fontRef>
+        </p:style>
+        <p:txBody>
+          <a:bodyPr rtlCol="0" anchor="ctr"/>
+          <a:lstStyle/>
+          <a:p>
+            <a:pPr algn="ctr"/>
+            <a:endParaRPr lang="ko-KR" altLang="en-US"/>
+          </a:p>
+        </p:txBody>
+      </p:sp>
+    </p:spTree>
+    <p:extLst>
+      <p:ext uri="{BB962C8B-B14F-4D97-AF65-F5344CB8AC3E}">
+        <p14:creationId xmlns:p14="http://schemas.microsoft.com/office/powerpoint/2010/main" val="3272489549"/>
+      </p:ext>
+    </p:extLst>
+  </p:cSld>
+  <p:clrMapOvr>
+    <a:masterClrMapping/>
+  </p:clrMapOvr>
+</p:sld>
+</file>
+
+<file path=ppt/slides/slide21.xml><?xml version="1.0" encoding="utf-8"?>
+<p:sld xmlns:a="http://schemas.openxmlformats.org/drawingml/2006/main" xmlns:r="http://schemas.openxmlformats.org/officeDocument/2006/relationships" xmlns:p="http://schemas.openxmlformats.org/presentationml/2006/main">
+  <p:cSld>
+    <p:spTree>
+      <p:nvGrpSpPr>
+        <p:cNvPr id="1" name=""/>
+        <p:cNvGrpSpPr/>
+        <p:nvPr/>
+      </p:nvGrpSpPr>
+      <p:grpSpPr>
+        <a:xfrm>
+          <a:off x="0" y="0"/>
+          <a:ext cx="0" cy="0"/>
+          <a:chOff x="0" y="0"/>
+          <a:chExt cx="0" cy="0"/>
+        </a:xfrm>
+      </p:grpSpPr>
+      <p:sp>
+        <p:nvSpPr>
+          <p:cNvPr id="5" name="TextBox 4"/>
+          <p:cNvSpPr txBox="1"/>
+          <p:nvPr/>
+        </p:nvSpPr>
+        <p:spPr>
+          <a:xfrm>
+            <a:off x="557213" y="473320"/>
+            <a:ext cx="2919389" cy="400110"/>
+          </a:xfrm>
+          <a:prstGeom prst="rect">
+            <a:avLst/>
+          </a:prstGeom>
+          <a:noFill/>
+        </p:spPr>
+        <p:txBody>
+          <a:bodyPr wrap="none" rtlCol="0">
+            <a:spAutoFit/>
+          </a:bodyPr>
+          <a:lstStyle/>
+          <a:p>
+            <a:r>
+              <a:rPr lang="ko-KR" altLang="en-US" sz="2000" b="1" dirty="0" smtClean="0">
+                <a:latin typeface="+mj-lt"/>
+              </a:rPr>
+              <a:t>연동 </a:t>
+            </a:r>
+            <a:r>
+              <a:rPr lang="en-US" altLang="ko-KR" sz="2000" b="1" dirty="0" smtClean="0">
+                <a:latin typeface="+mj-lt"/>
+              </a:rPr>
+              <a:t>: </a:t>
+            </a:r>
+            <a:r>
+              <a:rPr lang="ko-KR" altLang="en-US" sz="2000" b="1" dirty="0" smtClean="0">
+                <a:latin typeface="+mj-lt"/>
+              </a:rPr>
+              <a:t>전자결재 창 오픈</a:t>
+            </a:r>
+            <a:endParaRPr lang="ko-KR" altLang="en-US" sz="2000" b="1" dirty="0">
+              <a:latin typeface="+mj-lt"/>
+            </a:endParaRPr>
+          </a:p>
+        </p:txBody>
+      </p:sp>
       <p:sp>
         <p:nvSpPr>
           <p:cNvPr id="6" name="TextBox 5"/>
@@ -8615,11 +8921,7 @@
             </a:r>
             <a:r>
               <a:rPr lang="ko-KR" altLang="en-US" sz="1400" dirty="0" smtClean="0"/>
-              <a:t>실제 구현할 </a:t>
-            </a:r>
-            <a:r>
-              <a:rPr lang="ko-KR" altLang="en-US" sz="1400" dirty="0" smtClean="0"/>
-              <a:t>때는 실제 데이터를 사용해야한다</a:t>
+              <a:t>실제 구현할 때는 실제 데이터를 사용해야한다</a:t>
             </a:r>
             <a:r>
               <a:rPr lang="en-US" altLang="ko-KR" sz="1400" dirty="0" smtClean="0"/>
@@ -8690,7 +8992,6 @@
               <a:rPr lang="en-US" altLang="ko-KR" sz="1400" dirty="0" smtClean="0"/>
               <a:t>.</a:t>
             </a:r>
-            <a:endParaRPr lang="en-US" altLang="ko-KR" sz="1400" dirty="0" smtClean="0"/>
           </a:p>
         </p:txBody>
       </p:sp>
@@ -8707,7 +9008,7 @@
 </p:sld>
 </file>
 
-<file path=ppt/slides/slide21.xml><?xml version="1.0" encoding="utf-8"?>
+<file path=ppt/slides/slide22.xml><?xml version="1.0" encoding="utf-8"?>
 <p:sld xmlns:a="http://schemas.openxmlformats.org/drawingml/2006/main" xmlns:r="http://schemas.openxmlformats.org/officeDocument/2006/relationships" xmlns:p="http://schemas.openxmlformats.org/presentationml/2006/main">
   <p:cSld>
     <p:spTree>
@@ -8864,7 +9165,7 @@
 </p:sld>
 </file>
 
-<file path=ppt/slides/slide22.xml><?xml version="1.0" encoding="utf-8"?>
+<file path=ppt/slides/slide23.xml><?xml version="1.0" encoding="utf-8"?>
 <p:sld xmlns:a="http://schemas.openxmlformats.org/drawingml/2006/main" xmlns:r="http://schemas.openxmlformats.org/officeDocument/2006/relationships" xmlns:p="http://schemas.openxmlformats.org/presentationml/2006/main">
   <p:cSld>
     <p:spTree>
@@ -9021,7 +9322,7 @@
 </p:sld>
 </file>
 
-<file path=ppt/slides/slide23.xml><?xml version="1.0" encoding="utf-8"?>
+<file path=ppt/slides/slide24.xml><?xml version="1.0" encoding="utf-8"?>
 <p:sld xmlns:a="http://schemas.openxmlformats.org/drawingml/2006/main" xmlns:r="http://schemas.openxmlformats.org/officeDocument/2006/relationships" xmlns:p="http://schemas.openxmlformats.org/presentationml/2006/main">
   <p:cSld>
     <p:spTree>
@@ -9381,7 +9682,7 @@
 </p:sld>
 </file>
 
-<file path=ppt/slides/slide24.xml><?xml version="1.0" encoding="utf-8"?>
+<file path=ppt/slides/slide25.xml><?xml version="1.0" encoding="utf-8"?>
 <p:sld xmlns:a="http://schemas.openxmlformats.org/drawingml/2006/main" xmlns:r="http://schemas.openxmlformats.org/officeDocument/2006/relationships" xmlns:p="http://schemas.openxmlformats.org/presentationml/2006/main">
   <p:cSld>
     <p:spTree>
@@ -9613,7 +9914,7 @@
 </p:sld>
 </file>
 
-<file path=ppt/slides/slide25.xml><?xml version="1.0" encoding="utf-8"?>
+<file path=ppt/slides/slide26.xml><?xml version="1.0" encoding="utf-8"?>
 <p:sld xmlns:a="http://schemas.openxmlformats.org/drawingml/2006/main" xmlns:r="http://schemas.openxmlformats.org/officeDocument/2006/relationships" xmlns:p="http://schemas.openxmlformats.org/presentationml/2006/main">
   <p:cSld>
     <p:spTree>
@@ -10054,7 +10355,7 @@
 </p:sld>
 </file>
 
-<file path=ppt/slides/slide26.xml><?xml version="1.0" encoding="utf-8"?>
+<file path=ppt/slides/slide27.xml><?xml version="1.0" encoding="utf-8"?>
 <p:sld xmlns:a="http://schemas.openxmlformats.org/drawingml/2006/main" xmlns:r="http://schemas.openxmlformats.org/officeDocument/2006/relationships" xmlns:p="http://schemas.openxmlformats.org/presentationml/2006/main">
   <p:cSld>
     <p:spTree>
@@ -10375,7 +10676,7 @@
 </p:sld>
 </file>
 
-<file path=ppt/slides/slide27.xml><?xml version="1.0" encoding="utf-8"?>
+<file path=ppt/slides/slide28.xml><?xml version="1.0" encoding="utf-8"?>
 <p:sld xmlns:a="http://schemas.openxmlformats.org/drawingml/2006/main" xmlns:r="http://schemas.openxmlformats.org/officeDocument/2006/relationships" xmlns:p="http://schemas.openxmlformats.org/presentationml/2006/main">
   <p:cSld>
     <p:spTree>
@@ -14127,7 +14428,7 @@
         <p:spPr>
           <a:xfrm>
             <a:off x="557213" y="1227084"/>
-            <a:ext cx="4798108" cy="738664"/>
+            <a:ext cx="5331909" cy="738664"/>
           </a:xfrm>
           <a:prstGeom prst="rect">
             <a:avLst/>
@@ -14176,6 +14477,30 @@
             <a:r>
               <a:rPr lang="ko-KR" altLang="en-US" sz="1400" dirty="0" err="1" smtClean="0"/>
               <a:t>만들어야함</a:t>
+            </a:r>
+            <a:r>
+              <a:rPr lang="ko-KR" altLang="en-US" sz="1400" dirty="0" smtClean="0"/>
+              <a:t> </a:t>
+            </a:r>
+            <a:r>
+              <a:rPr lang="en-US" altLang="ko-KR" sz="1400" dirty="0" smtClean="0"/>
+              <a:t>(</a:t>
+            </a:r>
+            <a:r>
+              <a:rPr lang="en-US" altLang="ko-KR" sz="1400" dirty="0" err="1" smtClean="0"/>
+              <a:t>connWithUI_sample.jsp</a:t>
+            </a:r>
+            <a:r>
+              <a:rPr lang="en-US" altLang="ko-KR" sz="1400" dirty="0" smtClean="0"/>
+              <a:t> </a:t>
+            </a:r>
+            <a:r>
+              <a:rPr lang="ko-KR" altLang="en-US" sz="1400" dirty="0" smtClean="0"/>
+              <a:t>참고</a:t>
+            </a:r>
+            <a:r>
+              <a:rPr lang="en-US" altLang="ko-KR" sz="1400" dirty="0" smtClean="0"/>
+              <a:t>)</a:t>
             </a:r>
             <a:endParaRPr lang="en-US" altLang="ko-KR" sz="1400" dirty="0" smtClean="0"/>
           </a:p>
@@ -14735,7 +15060,7 @@
         <p:spPr>
           <a:xfrm>
             <a:off x="557213" y="1227084"/>
-            <a:ext cx="4798108" cy="738664"/>
+            <a:ext cx="5331909" cy="738664"/>
           </a:xfrm>
           <a:prstGeom prst="rect">
             <a:avLst/>
@@ -14779,13 +15104,41 @@
             </a:r>
             <a:r>
               <a:rPr lang="ko-KR" altLang="en-US" sz="1400" dirty="0" smtClean="0"/>
-              <a:t>는 직접 </a:t>
-            </a:r>
-            <a:r>
-              <a:rPr lang="ko-KR" altLang="en-US" sz="1400" dirty="0" err="1" smtClean="0"/>
+              <a:t>는 </a:t>
+            </a:r>
+            <a:r>
+              <a:rPr lang="ko-KR" altLang="en-US" sz="1400" dirty="0"/>
+              <a:t>직접 </a:t>
+            </a:r>
+            <a:r>
+              <a:rPr lang="ko-KR" altLang="en-US" sz="1400" dirty="0" err="1"/>
               <a:t>만들어야함</a:t>
             </a:r>
-            <a:endParaRPr lang="en-US" altLang="ko-KR" sz="1400" dirty="0" smtClean="0"/>
+            <a:r>
+              <a:rPr lang="ko-KR" altLang="en-US" sz="1400" dirty="0"/>
+              <a:t> </a:t>
+            </a:r>
+            <a:r>
+              <a:rPr lang="en-US" altLang="ko-KR" sz="1400" dirty="0"/>
+              <a:t>(</a:t>
+            </a:r>
+            <a:r>
+              <a:rPr lang="en-US" altLang="ko-KR" sz="1400" dirty="0" err="1"/>
+              <a:t>connWithUI_sample.jsp</a:t>
+            </a:r>
+            <a:r>
+              <a:rPr lang="en-US" altLang="ko-KR" sz="1400" dirty="0"/>
+              <a:t> </a:t>
+            </a:r>
+            <a:r>
+              <a:rPr lang="ko-KR" altLang="en-US" sz="1400" dirty="0"/>
+              <a:t>참고</a:t>
+            </a:r>
+            <a:r>
+              <a:rPr lang="en-US" altLang="ko-KR" sz="1400" dirty="0" smtClean="0"/>
+              <a:t>)</a:t>
+            </a:r>
+            <a:endParaRPr lang="en-US" altLang="ko-KR" sz="1400" dirty="0"/>
           </a:p>
         </p:txBody>
       </p:sp>

--- a/docs/tech/ezApprovalG/전자결재연동/전자결재 연동 개발 가이드 문서.pptx
+++ b/docs/tech/ezApprovalG/전자결재연동/전자결재 연동 개발 가이드 문서.pptx
@@ -33,6 +33,7 @@
     <p:sldId id="273" r:id="rId27"/>
     <p:sldId id="275" r:id="rId28"/>
     <p:sldId id="276" r:id="rId29"/>
+    <p:sldId id="285" r:id="rId30"/>
   </p:sldIdLst>
   <p:sldSz cx="12192000" cy="6858000"/>
   <p:notesSz cx="6858000" cy="9144000"/>
@@ -202,6 +203,11 @@
             <p14:sldId id="276"/>
           </p14:sldIdLst>
         </p14:section>
+        <p14:section name="기타" id="{A53C4086-37CE-44A4-BCAD-2055532D0B5C}">
+          <p14:sldIdLst>
+            <p14:sldId id="285"/>
+          </p14:sldIdLst>
+        </p14:section>
       </p14:sectionLst>
     </p:ext>
     <p:ext uri="{EFAFB233-063F-42B5-8137-9DF3F51BA10A}">
@@ -342,7 +348,7 @@
           <a:p>
             <a:fld id="{59E90729-2BA8-420C-8988-44846A72BE72}" type="datetimeFigureOut">
               <a:rPr lang="ko-KR" altLang="en-US" smtClean="0"/>
-              <a:t>2021-02-15</a:t>
+              <a:t>2021-02-18</a:t>
             </a:fld>
             <a:endParaRPr lang="ko-KR" altLang="en-US"/>
           </a:p>
@@ -512,7 +518,7 @@
           <a:p>
             <a:fld id="{59E90729-2BA8-420C-8988-44846A72BE72}" type="datetimeFigureOut">
               <a:rPr lang="ko-KR" altLang="en-US" smtClean="0"/>
-              <a:t>2021-02-15</a:t>
+              <a:t>2021-02-18</a:t>
             </a:fld>
             <a:endParaRPr lang="ko-KR" altLang="en-US"/>
           </a:p>
@@ -692,7 +698,7 @@
           <a:p>
             <a:fld id="{59E90729-2BA8-420C-8988-44846A72BE72}" type="datetimeFigureOut">
               <a:rPr lang="ko-KR" altLang="en-US" smtClean="0"/>
-              <a:t>2021-02-15</a:t>
+              <a:t>2021-02-18</a:t>
             </a:fld>
             <a:endParaRPr lang="ko-KR" altLang="en-US"/>
           </a:p>
@@ -862,7 +868,7 @@
           <a:p>
             <a:fld id="{59E90729-2BA8-420C-8988-44846A72BE72}" type="datetimeFigureOut">
               <a:rPr lang="ko-KR" altLang="en-US" smtClean="0"/>
-              <a:t>2021-02-15</a:t>
+              <a:t>2021-02-18</a:t>
             </a:fld>
             <a:endParaRPr lang="ko-KR" altLang="en-US"/>
           </a:p>
@@ -1108,7 +1114,7 @@
           <a:p>
             <a:fld id="{59E90729-2BA8-420C-8988-44846A72BE72}" type="datetimeFigureOut">
               <a:rPr lang="ko-KR" altLang="en-US" smtClean="0"/>
-              <a:t>2021-02-15</a:t>
+              <a:t>2021-02-18</a:t>
             </a:fld>
             <a:endParaRPr lang="ko-KR" altLang="en-US"/>
           </a:p>
@@ -1340,7 +1346,7 @@
           <a:p>
             <a:fld id="{59E90729-2BA8-420C-8988-44846A72BE72}" type="datetimeFigureOut">
               <a:rPr lang="ko-KR" altLang="en-US" smtClean="0"/>
-              <a:t>2021-02-15</a:t>
+              <a:t>2021-02-18</a:t>
             </a:fld>
             <a:endParaRPr lang="ko-KR" altLang="en-US"/>
           </a:p>
@@ -1707,7 +1713,7 @@
           <a:p>
             <a:fld id="{59E90729-2BA8-420C-8988-44846A72BE72}" type="datetimeFigureOut">
               <a:rPr lang="ko-KR" altLang="en-US" smtClean="0"/>
-              <a:t>2021-02-15</a:t>
+              <a:t>2021-02-18</a:t>
             </a:fld>
             <a:endParaRPr lang="ko-KR" altLang="en-US"/>
           </a:p>
@@ -1825,7 +1831,7 @@
           <a:p>
             <a:fld id="{59E90729-2BA8-420C-8988-44846A72BE72}" type="datetimeFigureOut">
               <a:rPr lang="ko-KR" altLang="en-US" smtClean="0"/>
-              <a:t>2021-02-15</a:t>
+              <a:t>2021-02-18</a:t>
             </a:fld>
             <a:endParaRPr lang="ko-KR" altLang="en-US"/>
           </a:p>
@@ -1920,7 +1926,7 @@
           <a:p>
             <a:fld id="{59E90729-2BA8-420C-8988-44846A72BE72}" type="datetimeFigureOut">
               <a:rPr lang="ko-KR" altLang="en-US" smtClean="0"/>
-              <a:t>2021-02-15</a:t>
+              <a:t>2021-02-18</a:t>
             </a:fld>
             <a:endParaRPr lang="ko-KR" altLang="en-US"/>
           </a:p>
@@ -2197,7 +2203,7 @@
           <a:p>
             <a:fld id="{59E90729-2BA8-420C-8988-44846A72BE72}" type="datetimeFigureOut">
               <a:rPr lang="ko-KR" altLang="en-US" smtClean="0"/>
-              <a:t>2021-02-15</a:t>
+              <a:t>2021-02-18</a:t>
             </a:fld>
             <a:endParaRPr lang="ko-KR" altLang="en-US"/>
           </a:p>
@@ -2450,7 +2456,7 @@
           <a:p>
             <a:fld id="{59E90729-2BA8-420C-8988-44846A72BE72}" type="datetimeFigureOut">
               <a:rPr lang="ko-KR" altLang="en-US" smtClean="0"/>
-              <a:t>2021-02-15</a:t>
+              <a:t>2021-02-18</a:t>
             </a:fld>
             <a:endParaRPr lang="ko-KR" altLang="en-US"/>
           </a:p>
@@ -2663,7 +2669,7 @@
           <a:p>
             <a:fld id="{59E90729-2BA8-420C-8988-44846A72BE72}" type="datetimeFigureOut">
               <a:rPr lang="ko-KR" altLang="en-US" smtClean="0"/>
-              <a:t>2021-02-15</a:t>
+              <a:t>2021-02-18</a:t>
             </a:fld>
             <a:endParaRPr lang="ko-KR" altLang="en-US"/>
           </a:p>
@@ -7374,7 +7380,6 @@
               <a:rPr lang="en-US" altLang="ko-KR" sz="1400" dirty="0" smtClean="0"/>
               <a:t>.</a:t>
             </a:r>
-            <a:endParaRPr lang="en-US" altLang="ko-KR" sz="1400" dirty="0" smtClean="0"/>
           </a:p>
         </p:txBody>
       </p:sp>
@@ -11020,6 +11025,454 @@
     <p:extLst>
       <p:ext uri="{BB962C8B-B14F-4D97-AF65-F5344CB8AC3E}">
         <p14:creationId xmlns:p14="http://schemas.microsoft.com/office/powerpoint/2010/main" val="51210504"/>
+      </p:ext>
+    </p:extLst>
+  </p:cSld>
+  <p:clrMapOvr>
+    <a:masterClrMapping/>
+  </p:clrMapOvr>
+  <p:timing>
+    <p:tnLst>
+      <p:par>
+        <p:cTn id="1" dur="indefinite" restart="never" nodeType="tmRoot"/>
+      </p:par>
+    </p:tnLst>
+  </p:timing>
+</p:sld>
+</file>
+
+<file path=ppt/slides/slide29.xml><?xml version="1.0" encoding="utf-8"?>
+<p:sld xmlns:a="http://schemas.openxmlformats.org/drawingml/2006/main" xmlns:r="http://schemas.openxmlformats.org/officeDocument/2006/relationships" xmlns:p="http://schemas.openxmlformats.org/presentationml/2006/main">
+  <p:cSld>
+    <p:spTree>
+      <p:nvGrpSpPr>
+        <p:cNvPr id="1" name=""/>
+        <p:cNvGrpSpPr/>
+        <p:nvPr/>
+      </p:nvGrpSpPr>
+      <p:grpSpPr>
+        <a:xfrm>
+          <a:off x="0" y="0"/>
+          <a:ext cx="0" cy="0"/>
+          <a:chOff x="0" y="0"/>
+          <a:chExt cx="0" cy="0"/>
+        </a:xfrm>
+      </p:grpSpPr>
+      <p:sp>
+        <p:nvSpPr>
+          <p:cNvPr id="5" name="TextBox 4"/>
+          <p:cNvSpPr txBox="1"/>
+          <p:nvPr/>
+        </p:nvSpPr>
+        <p:spPr>
+          <a:xfrm>
+            <a:off x="557213" y="473320"/>
+            <a:ext cx="4390946" cy="400110"/>
+          </a:xfrm>
+          <a:prstGeom prst="rect">
+            <a:avLst/>
+          </a:prstGeom>
+          <a:noFill/>
+        </p:spPr>
+        <p:txBody>
+          <a:bodyPr wrap="none" rtlCol="0">
+            <a:spAutoFit/>
+          </a:bodyPr>
+          <a:lstStyle/>
+          <a:p>
+            <a:r>
+              <a:rPr lang="ko-KR" altLang="en-US" sz="2000" b="1" dirty="0" smtClean="0">
+                <a:latin typeface="+mj-lt"/>
+              </a:rPr>
+              <a:t>연동 양식이지만 에디터가 필요할 때</a:t>
+            </a:r>
+            <a:endParaRPr lang="ko-KR" altLang="en-US" sz="2000" b="1" dirty="0">
+              <a:latin typeface="+mj-lt"/>
+            </a:endParaRPr>
+          </a:p>
+        </p:txBody>
+      </p:sp>
+      <p:sp>
+        <p:nvSpPr>
+          <p:cNvPr id="7" name="TextBox 6"/>
+          <p:cNvSpPr txBox="1"/>
+          <p:nvPr/>
+        </p:nvSpPr>
+        <p:spPr>
+          <a:xfrm>
+            <a:off x="557213" y="1227084"/>
+            <a:ext cx="7492757" cy="954107"/>
+          </a:xfrm>
+          <a:prstGeom prst="rect">
+            <a:avLst/>
+          </a:prstGeom>
+          <a:noFill/>
+        </p:spPr>
+        <p:txBody>
+          <a:bodyPr wrap="none" rtlCol="0">
+            <a:spAutoFit/>
+          </a:bodyPr>
+          <a:lstStyle/>
+          <a:p>
+            <a:r>
+              <a:rPr lang="ko-KR" altLang="en-US" sz="1400" dirty="0" smtClean="0"/>
+              <a:t>기본적으로 연동데이터는 수정할 수 없는 것이 원칙이기 때문에 에디터를 사용하지 않으며</a:t>
+            </a:r>
+            <a:r>
+              <a:rPr lang="en-US" altLang="ko-KR" sz="1400" dirty="0" smtClean="0"/>
+              <a:t>, </a:t>
+            </a:r>
+          </a:p>
+          <a:p>
+            <a:r>
+              <a:rPr lang="ko-KR" altLang="en-US" sz="1400" dirty="0" smtClean="0"/>
+              <a:t>에디터 내부에서 </a:t>
+            </a:r>
+            <a:r>
+              <a:rPr lang="ko-KR" altLang="en-US" sz="1400" dirty="0" err="1" smtClean="0"/>
+              <a:t>연동필드를</a:t>
+            </a:r>
+            <a:r>
+              <a:rPr lang="ko-KR" altLang="en-US" sz="1400" dirty="0" smtClean="0"/>
+              <a:t> 가져올 수도 없다</a:t>
+            </a:r>
+            <a:r>
+              <a:rPr lang="en-US" altLang="ko-KR" sz="1400" dirty="0" smtClean="0"/>
+              <a:t>. </a:t>
+            </a:r>
+          </a:p>
+          <a:p>
+            <a:endParaRPr lang="en-US" altLang="ko-KR" sz="1400" dirty="0"/>
+          </a:p>
+          <a:p>
+            <a:r>
+              <a:rPr lang="ko-KR" altLang="en-US" sz="1400" dirty="0" smtClean="0"/>
+              <a:t>하지만 </a:t>
+            </a:r>
+            <a:r>
+              <a:rPr lang="ko-KR" altLang="en-US" sz="1400" dirty="0" err="1" smtClean="0"/>
+              <a:t>연동영역과</a:t>
+            </a:r>
+            <a:r>
+              <a:rPr lang="ko-KR" altLang="en-US" sz="1400" dirty="0" smtClean="0"/>
+              <a:t> 별개로 에디터를 추가하고 싶다면</a:t>
+            </a:r>
+            <a:r>
+              <a:rPr lang="en-US" altLang="ko-KR" sz="1400" dirty="0"/>
+              <a:t> </a:t>
+            </a:r>
+            <a:r>
+              <a:rPr lang="ko-KR" altLang="en-US" sz="1400" dirty="0" err="1" smtClean="0"/>
+              <a:t>폼빌더를</a:t>
+            </a:r>
+            <a:r>
+              <a:rPr lang="ko-KR" altLang="en-US" sz="1400" dirty="0" smtClean="0"/>
+              <a:t> 사용한다</a:t>
+            </a:r>
+            <a:r>
+              <a:rPr lang="en-US" altLang="ko-KR" sz="1400" dirty="0" smtClean="0"/>
+              <a:t>. </a:t>
+            </a:r>
+            <a:endParaRPr lang="en-US" altLang="ko-KR" sz="1400" dirty="0" smtClean="0"/>
+          </a:p>
+        </p:txBody>
+      </p:sp>
+      <p:pic>
+        <p:nvPicPr>
+          <p:cNvPr id="2" name="그림 1"/>
+          <p:cNvPicPr>
+            <a:picLocks noChangeAspect="1"/>
+          </p:cNvPicPr>
+          <p:nvPr/>
+        </p:nvPicPr>
+        <p:blipFill>
+          <a:blip r:embed="rId2"/>
+          <a:stretch>
+            <a:fillRect/>
+          </a:stretch>
+        </p:blipFill>
+        <p:spPr>
+          <a:xfrm>
+            <a:off x="557213" y="2534845"/>
+            <a:ext cx="3361038" cy="3125656"/>
+          </a:xfrm>
+          <a:prstGeom prst="rect">
+            <a:avLst/>
+          </a:prstGeom>
+        </p:spPr>
+      </p:pic>
+      <p:sp>
+        <p:nvSpPr>
+          <p:cNvPr id="9" name="TextBox 8"/>
+          <p:cNvSpPr txBox="1"/>
+          <p:nvPr/>
+        </p:nvSpPr>
+        <p:spPr>
+          <a:xfrm>
+            <a:off x="4519707" y="2389083"/>
+            <a:ext cx="6939125" cy="1169551"/>
+          </a:xfrm>
+          <a:prstGeom prst="rect">
+            <a:avLst/>
+          </a:prstGeom>
+          <a:noFill/>
+        </p:spPr>
+        <p:txBody>
+          <a:bodyPr wrap="square" rtlCol="0">
+            <a:spAutoFit/>
+          </a:bodyPr>
+          <a:lstStyle/>
+          <a:p>
+            <a:r>
+              <a:rPr lang="ko-KR" altLang="en-US" sz="1400" dirty="0" err="1" smtClean="0"/>
+              <a:t>폼빌더</a:t>
+            </a:r>
+            <a:r>
+              <a:rPr lang="ko-KR" altLang="en-US" sz="1400" dirty="0" smtClean="0"/>
+              <a:t> 양식의 컨트롤들이 연동 필드가 된다</a:t>
+            </a:r>
+            <a:r>
+              <a:rPr lang="en-US" altLang="ko-KR" sz="1400" dirty="0" smtClean="0"/>
+              <a:t>.</a:t>
+            </a:r>
+          </a:p>
+          <a:p>
+            <a:r>
+              <a:rPr lang="ko-KR" altLang="en-US" sz="1400" dirty="0" smtClean="0"/>
+              <a:t>주의</a:t>
+            </a:r>
+            <a:r>
+              <a:rPr lang="en-US" altLang="ko-KR" sz="1400" dirty="0" smtClean="0"/>
+              <a:t>) </a:t>
+            </a:r>
+            <a:r>
+              <a:rPr lang="ko-KR" altLang="en-US" sz="1400" dirty="0" err="1" smtClean="0"/>
+              <a:t>폼빌더</a:t>
+            </a:r>
+            <a:r>
+              <a:rPr lang="ko-KR" altLang="en-US" sz="1400" dirty="0" smtClean="0"/>
+              <a:t> 양식의 컨트롤은 보통 </a:t>
+            </a:r>
+            <a:r>
+              <a:rPr lang="en-US" altLang="ko-KR" sz="1400" dirty="0" smtClean="0"/>
+              <a:t>INPUT</a:t>
+            </a:r>
+            <a:r>
+              <a:rPr lang="ko-KR" altLang="en-US" sz="1400" dirty="0" smtClean="0"/>
+              <a:t>태그이기 때문에 </a:t>
+            </a:r>
+            <a:r>
+              <a:rPr lang="en-US" altLang="ko-KR" sz="1400" dirty="0" smtClean="0"/>
+              <a:t>HTML</a:t>
+            </a:r>
+            <a:r>
+              <a:rPr lang="ko-KR" altLang="en-US" sz="1400" dirty="0" smtClean="0"/>
+              <a:t>형태로 보여줄 수 없다</a:t>
+            </a:r>
+            <a:r>
+              <a:rPr lang="en-US" altLang="ko-KR" sz="1400" dirty="0" smtClean="0"/>
+              <a:t>.</a:t>
+            </a:r>
+          </a:p>
+          <a:p>
+            <a:r>
+              <a:rPr lang="ko-KR" altLang="en-US" sz="1400" dirty="0" smtClean="0"/>
+              <a:t>주의</a:t>
+            </a:r>
+            <a:r>
+              <a:rPr lang="en-US" altLang="ko-KR" sz="1400" dirty="0" smtClean="0"/>
+              <a:t>) </a:t>
+            </a:r>
+            <a:r>
+              <a:rPr lang="ko-KR" altLang="en-US" sz="1400" dirty="0" smtClean="0"/>
+              <a:t>텍스트가 </a:t>
+            </a:r>
+            <a:r>
+              <a:rPr lang="ko-KR" altLang="en-US" sz="1400" dirty="0" err="1" smtClean="0"/>
+              <a:t>문서상에서</a:t>
+            </a:r>
+            <a:r>
+              <a:rPr lang="ko-KR" altLang="en-US" sz="1400" dirty="0" smtClean="0"/>
+              <a:t> </a:t>
+            </a:r>
+            <a:r>
+              <a:rPr lang="ko-KR" altLang="en-US" sz="1400" dirty="0" err="1" smtClean="0"/>
+              <a:t>잘려보이면</a:t>
+            </a:r>
+            <a:r>
+              <a:rPr lang="ko-KR" altLang="en-US" sz="1400" dirty="0" smtClean="0"/>
+              <a:t> 안되기때문에 텍스트가 길어질 것 같다면 </a:t>
+            </a:r>
+            <a:r>
+              <a:rPr lang="en-US" altLang="ko-KR" sz="1400" dirty="0" smtClean="0"/>
+              <a:t>TEXTAREA </a:t>
+            </a:r>
+            <a:r>
+              <a:rPr lang="ko-KR" altLang="en-US" sz="1400" dirty="0" smtClean="0"/>
+              <a:t>컨트롤을 사용한다</a:t>
+            </a:r>
+            <a:r>
+              <a:rPr lang="en-US" altLang="ko-KR" sz="1400" dirty="0" smtClean="0"/>
+              <a:t>.</a:t>
+            </a:r>
+            <a:endParaRPr lang="en-US" altLang="ko-KR" sz="1400" dirty="0" smtClean="0"/>
+          </a:p>
+        </p:txBody>
+      </p:sp>
+      <p:sp>
+        <p:nvSpPr>
+          <p:cNvPr id="10" name="TextBox 9"/>
+          <p:cNvSpPr txBox="1"/>
+          <p:nvPr/>
+        </p:nvSpPr>
+        <p:spPr>
+          <a:xfrm>
+            <a:off x="4519707" y="3974896"/>
+            <a:ext cx="6939125" cy="523220"/>
+          </a:xfrm>
+          <a:prstGeom prst="rect">
+            <a:avLst/>
+          </a:prstGeom>
+          <a:noFill/>
+        </p:spPr>
+        <p:txBody>
+          <a:bodyPr wrap="square" rtlCol="0">
+            <a:spAutoFit/>
+          </a:bodyPr>
+          <a:lstStyle/>
+          <a:p>
+            <a:r>
+              <a:rPr lang="ko-KR" altLang="en-US" sz="1400" dirty="0" smtClean="0"/>
+              <a:t>아래 </a:t>
+            </a:r>
+            <a:r>
+              <a:rPr lang="en-US" altLang="ko-KR" sz="1400" dirty="0" smtClean="0"/>
+              <a:t>TD</a:t>
+            </a:r>
+            <a:r>
+              <a:rPr lang="ko-KR" altLang="en-US" sz="1400" dirty="0" smtClean="0"/>
+              <a:t>태그에 </a:t>
+            </a:r>
+            <a:r>
+              <a:rPr lang="en-US" altLang="ko-KR" sz="1400" dirty="0" smtClean="0"/>
+              <a:t>id=“reform-editor” </a:t>
+            </a:r>
+            <a:r>
+              <a:rPr lang="ko-KR" altLang="en-US" sz="1400" dirty="0" smtClean="0"/>
+              <a:t>를 추가함으로서 </a:t>
+            </a:r>
+            <a:r>
+              <a:rPr lang="ko-KR" altLang="en-US" sz="1400" dirty="0" err="1" smtClean="0"/>
+              <a:t>폼빌더</a:t>
+            </a:r>
+            <a:r>
+              <a:rPr lang="ko-KR" altLang="en-US" sz="1400" dirty="0" smtClean="0"/>
+              <a:t> 안에 에디터를 추가할 수 있다</a:t>
+            </a:r>
+            <a:r>
+              <a:rPr lang="en-US" altLang="ko-KR" sz="1400" dirty="0" smtClean="0"/>
+              <a:t>.</a:t>
+            </a:r>
+            <a:endParaRPr lang="en-US" altLang="ko-KR" sz="1400" dirty="0" smtClean="0"/>
+          </a:p>
+        </p:txBody>
+      </p:sp>
+      <p:sp>
+        <p:nvSpPr>
+          <p:cNvPr id="11" name="오른쪽 중괄호 10"/>
+          <p:cNvSpPr/>
+          <p:nvPr/>
+        </p:nvSpPr>
+        <p:spPr>
+          <a:xfrm>
+            <a:off x="4028303" y="2603157"/>
+            <a:ext cx="271848" cy="741405"/>
+          </a:xfrm>
+          <a:prstGeom prst="rightBrace">
+            <a:avLst>
+              <a:gd name="adj1" fmla="val 8333"/>
+              <a:gd name="adj2" fmla="val 32222"/>
+            </a:avLst>
+          </a:prstGeom>
+          <a:ln w="12700">
+            <a:solidFill>
+              <a:srgbClr val="FF0000"/>
+            </a:solidFill>
+          </a:ln>
+        </p:spPr>
+        <p:style>
+          <a:lnRef idx="1">
+            <a:schemeClr val="accent1"/>
+          </a:lnRef>
+          <a:fillRef idx="0">
+            <a:schemeClr val="accent1"/>
+          </a:fillRef>
+          <a:effectRef idx="0">
+            <a:schemeClr val="accent1"/>
+          </a:effectRef>
+          <a:fontRef idx="minor">
+            <a:schemeClr val="tx1"/>
+          </a:fontRef>
+        </p:style>
+        <p:txBody>
+          <a:bodyPr rtlCol="0" anchor="ctr"/>
+          <a:lstStyle/>
+          <a:p>
+            <a:pPr algn="ctr"/>
+            <a:endParaRPr lang="ko-KR" altLang="en-US"/>
+          </a:p>
+        </p:txBody>
+      </p:sp>
+      <p:sp>
+        <p:nvSpPr>
+          <p:cNvPr id="12" name="오른쪽 중괄호 11"/>
+          <p:cNvSpPr/>
+          <p:nvPr/>
+        </p:nvSpPr>
+        <p:spPr>
+          <a:xfrm>
+            <a:off x="4028303" y="3518070"/>
+            <a:ext cx="271848" cy="1960092"/>
+          </a:xfrm>
+          <a:prstGeom prst="rightBrace">
+            <a:avLst>
+              <a:gd name="adj1" fmla="val 8333"/>
+              <a:gd name="adj2" fmla="val 32222"/>
+            </a:avLst>
+          </a:prstGeom>
+          <a:ln w="12700">
+            <a:solidFill>
+              <a:srgbClr val="FF0000"/>
+            </a:solidFill>
+          </a:ln>
+        </p:spPr>
+        <p:style>
+          <a:lnRef idx="1">
+            <a:schemeClr val="accent1"/>
+          </a:lnRef>
+          <a:fillRef idx="0">
+            <a:schemeClr val="accent1"/>
+          </a:fillRef>
+          <a:effectRef idx="0">
+            <a:schemeClr val="accent1"/>
+          </a:effectRef>
+          <a:fontRef idx="minor">
+            <a:schemeClr val="tx1"/>
+          </a:fontRef>
+        </p:style>
+        <p:txBody>
+          <a:bodyPr rtlCol="0" anchor="ctr"/>
+          <a:lstStyle/>
+          <a:p>
+            <a:pPr algn="ctr"/>
+            <a:endParaRPr lang="ko-KR" altLang="en-US"/>
+          </a:p>
+        </p:txBody>
+      </p:sp>
+    </p:spTree>
+    <p:extLst>
+      <p:ext uri="{BB962C8B-B14F-4D97-AF65-F5344CB8AC3E}">
+        <p14:creationId xmlns:p14="http://schemas.microsoft.com/office/powerpoint/2010/main" val="3649701759"/>
       </p:ext>
     </p:extLst>
   </p:cSld>
@@ -12606,7 +13059,7 @@
         <p:spPr>
           <a:xfrm>
             <a:off x="557214" y="1017534"/>
-            <a:ext cx="11006136" cy="523220"/>
+            <a:ext cx="11006136" cy="3108543"/>
           </a:xfrm>
           <a:prstGeom prst="rect">
             <a:avLst/>
@@ -12693,6 +13146,315 @@
               <a:rPr lang="en-US" altLang="ko-KR" sz="1400" dirty="0" smtClean="0"/>
               <a:t>.</a:t>
             </a:r>
+          </a:p>
+          <a:p>
+            <a:pPr marL="285750" indent="-285750">
+              <a:buFont typeface="Arial" panose="020B0604020202020204" pitchFamily="34" charset="0"/>
+              <a:buChar char="•"/>
+            </a:pPr>
+            <a:r>
+              <a:rPr lang="en-US" altLang="ko-KR" sz="1400" dirty="0" err="1" smtClean="0"/>
+              <a:t>processidx</a:t>
+            </a:r>
+            <a:r>
+              <a:rPr lang="en-US" altLang="ko-KR" sz="1400" dirty="0" smtClean="0"/>
+              <a:t> (</a:t>
+            </a:r>
+            <a:r>
+              <a:rPr lang="ko-KR" altLang="en-US" sz="1400" dirty="0" smtClean="0"/>
+              <a:t>아래 자주사용하는 시점 </a:t>
+            </a:r>
+            <a:r>
+              <a:rPr lang="ko-KR" altLang="en-US" sz="1400" dirty="0" smtClean="0"/>
+              <a:t>정리</a:t>
+            </a:r>
+            <a:r>
+              <a:rPr lang="en-US" altLang="ko-KR" sz="1400" dirty="0" smtClean="0"/>
+              <a:t>, </a:t>
+            </a:r>
+            <a:r>
+              <a:rPr lang="ko-KR" altLang="en-US" sz="1400" dirty="0" smtClean="0"/>
+              <a:t>대부분의 시점은 </a:t>
+            </a:r>
+            <a:r>
+              <a:rPr lang="en-US" altLang="ko-KR" sz="1400" dirty="0" smtClean="0"/>
+              <a:t>{</a:t>
+            </a:r>
+            <a:r>
+              <a:rPr lang="ko-KR" altLang="en-US" sz="1400" dirty="0" smtClean="0"/>
+              <a:t>시점</a:t>
+            </a:r>
+            <a:r>
+              <a:rPr lang="en-US" altLang="ko-KR" sz="1400" dirty="0" smtClean="0"/>
+              <a:t>}_BEFORE, {</a:t>
+            </a:r>
+            <a:r>
+              <a:rPr lang="ko-KR" altLang="en-US" sz="1400" dirty="0" smtClean="0"/>
+              <a:t>시점</a:t>
+            </a:r>
+            <a:r>
+              <a:rPr lang="en-US" altLang="ko-KR" sz="1400" dirty="0" smtClean="0"/>
+              <a:t>}_AFTER, {</a:t>
+            </a:r>
+            <a:r>
+              <a:rPr lang="ko-KR" altLang="en-US" sz="1400" dirty="0" smtClean="0"/>
+              <a:t>시점</a:t>
+            </a:r>
+            <a:r>
+              <a:rPr lang="en-US" altLang="ko-KR" sz="1400" dirty="0" smtClean="0"/>
+              <a:t>}_FAIL</a:t>
+            </a:r>
+            <a:r>
+              <a:rPr lang="ko-KR" altLang="en-US" sz="1400" dirty="0"/>
+              <a:t> </a:t>
+            </a:r>
+            <a:r>
+              <a:rPr lang="ko-KR" altLang="en-US" sz="1400" dirty="0" smtClean="0"/>
+              <a:t>등이 있고 보통 </a:t>
+            </a:r>
+            <a:r>
+              <a:rPr lang="en-US" altLang="ko-KR" sz="1400" dirty="0" smtClean="0"/>
+              <a:t>BEFORE</a:t>
+            </a:r>
+            <a:r>
+              <a:rPr lang="ko-KR" altLang="en-US" sz="1400" dirty="0" smtClean="0"/>
+              <a:t> 사용</a:t>
+            </a:r>
+            <a:r>
+              <a:rPr lang="en-US" altLang="ko-KR" sz="1400" dirty="0" smtClean="0"/>
+              <a:t>)</a:t>
+            </a:r>
+          </a:p>
+          <a:p>
+            <a:pPr marL="742950" lvl="1" indent="-285750">
+              <a:buFont typeface="Arial" panose="020B0604020202020204" pitchFamily="34" charset="0"/>
+              <a:buChar char="•"/>
+            </a:pPr>
+            <a:r>
+              <a:rPr lang="en-US" altLang="ko-KR" sz="1400" dirty="0" smtClean="0"/>
+              <a:t>INIT : </a:t>
+            </a:r>
+            <a:r>
+              <a:rPr lang="ko-KR" altLang="en-US" sz="1400" dirty="0" smtClean="0"/>
+              <a:t>초기화 </a:t>
+            </a:r>
+            <a:r>
+              <a:rPr lang="en-US" altLang="ko-KR" sz="1400" dirty="0" smtClean="0"/>
+              <a:t>(</a:t>
+            </a:r>
+            <a:r>
+              <a:rPr lang="ko-KR" altLang="en-US" sz="1400" dirty="0" err="1" smtClean="0"/>
+              <a:t>기안창</a:t>
+            </a:r>
+            <a:r>
+              <a:rPr lang="ko-KR" altLang="en-US" sz="1400" dirty="0" smtClean="0"/>
+              <a:t> 혹은 접수 창을 열자마자</a:t>
+            </a:r>
+            <a:r>
+              <a:rPr lang="en-US" altLang="ko-KR" sz="1400" dirty="0" smtClean="0"/>
+              <a:t>)</a:t>
+            </a:r>
+          </a:p>
+          <a:p>
+            <a:pPr marL="742950" lvl="1" indent="-285750">
+              <a:buFont typeface="Arial" panose="020B0604020202020204" pitchFamily="34" charset="0"/>
+              <a:buChar char="•"/>
+            </a:pPr>
+            <a:r>
+              <a:rPr lang="en-US" altLang="ko-KR" sz="1400" dirty="0" smtClean="0"/>
+              <a:t>DRAFTSAVE : </a:t>
+            </a:r>
+            <a:r>
+              <a:rPr lang="ko-KR" altLang="en-US" sz="1400" dirty="0" err="1" smtClean="0"/>
+              <a:t>기안상신</a:t>
+            </a:r>
+            <a:endParaRPr lang="en-US" altLang="ko-KR" sz="1400" dirty="0" smtClean="0"/>
+          </a:p>
+          <a:p>
+            <a:pPr marL="742950" lvl="1" indent="-285750">
+              <a:buFont typeface="Arial" panose="020B0604020202020204" pitchFamily="34" charset="0"/>
+              <a:buChar char="•"/>
+            </a:pPr>
+            <a:r>
+              <a:rPr lang="en-US" altLang="ko-KR" sz="1400" dirty="0" smtClean="0"/>
+              <a:t>DOCNUM or LAST_SIGN : </a:t>
+            </a:r>
+            <a:r>
+              <a:rPr lang="ko-KR" altLang="en-US" sz="1400" dirty="0" smtClean="0"/>
+              <a:t>문서번호 </a:t>
+            </a:r>
+            <a:r>
+              <a:rPr lang="ko-KR" altLang="en-US" sz="1400" dirty="0" err="1" smtClean="0"/>
+              <a:t>채번</a:t>
+            </a:r>
+            <a:r>
+              <a:rPr lang="ko-KR" altLang="en-US" sz="1400" dirty="0" smtClean="0"/>
+              <a:t> </a:t>
+            </a:r>
+            <a:r>
+              <a:rPr lang="en-US" altLang="ko-KR" sz="1400" dirty="0" smtClean="0"/>
+              <a:t>or </a:t>
+            </a:r>
+            <a:r>
+              <a:rPr lang="ko-KR" altLang="en-US" sz="1400" dirty="0" err="1" smtClean="0"/>
+              <a:t>최종사인</a:t>
+            </a:r>
+            <a:r>
+              <a:rPr lang="ko-KR" altLang="en-US" sz="1400" dirty="0" smtClean="0"/>
+              <a:t> </a:t>
+            </a:r>
+            <a:r>
+              <a:rPr lang="en-US" altLang="ko-KR" sz="1400" dirty="0" smtClean="0"/>
+              <a:t>(=</a:t>
+            </a:r>
+            <a:r>
+              <a:rPr lang="ko-KR" altLang="en-US" sz="1400" dirty="0" err="1" smtClean="0"/>
+              <a:t>최종결재</a:t>
+            </a:r>
+            <a:r>
+              <a:rPr lang="en-US" altLang="ko-KR" sz="1400" dirty="0" smtClean="0"/>
+              <a:t>)</a:t>
+            </a:r>
+          </a:p>
+          <a:p>
+            <a:pPr marL="742950" lvl="1" indent="-285750">
+              <a:buFont typeface="Arial" panose="020B0604020202020204" pitchFamily="34" charset="0"/>
+              <a:buChar char="•"/>
+            </a:pPr>
+            <a:r>
+              <a:rPr lang="en-US" altLang="ko-KR" sz="1400" dirty="0" smtClean="0"/>
+              <a:t>CALLBACK : </a:t>
+            </a:r>
+            <a:r>
+              <a:rPr lang="ko-KR" altLang="en-US" sz="1400" dirty="0" smtClean="0"/>
+              <a:t>회수</a:t>
+            </a:r>
+            <a:endParaRPr lang="en-US" altLang="ko-KR" sz="1400" dirty="0" smtClean="0"/>
+          </a:p>
+          <a:p>
+            <a:pPr marL="742950" lvl="1" indent="-285750">
+              <a:buFont typeface="Arial" panose="020B0604020202020204" pitchFamily="34" charset="0"/>
+              <a:buChar char="•"/>
+            </a:pPr>
+            <a:r>
+              <a:rPr lang="en-US" altLang="ko-KR" sz="1400" dirty="0" smtClean="0"/>
+              <a:t>BANSONG : </a:t>
+            </a:r>
+            <a:r>
+              <a:rPr lang="ko-KR" altLang="en-US" sz="1400" dirty="0" smtClean="0"/>
+              <a:t>반송</a:t>
+            </a:r>
+            <a:endParaRPr lang="en-US" altLang="ko-KR" sz="1400" dirty="0" smtClean="0"/>
+          </a:p>
+          <a:p>
+            <a:pPr marL="742950" lvl="1" indent="-285750">
+              <a:buFont typeface="Arial" panose="020B0604020202020204" pitchFamily="34" charset="0"/>
+              <a:buChar char="•"/>
+            </a:pPr>
+            <a:r>
+              <a:rPr lang="en-US" altLang="ko-KR" sz="1400" dirty="0" smtClean="0"/>
+              <a:t>HESONG : </a:t>
+            </a:r>
+            <a:r>
+              <a:rPr lang="ko-KR" altLang="en-US" sz="1400" dirty="0" smtClean="0"/>
+              <a:t>회송</a:t>
+            </a:r>
+            <a:endParaRPr lang="en-US" altLang="ko-KR" sz="1400" dirty="0" smtClean="0"/>
+          </a:p>
+          <a:p>
+            <a:pPr marL="285750" indent="-285750">
+              <a:buFont typeface="Arial" panose="020B0604020202020204" pitchFamily="34" charset="0"/>
+              <a:buChar char="•"/>
+            </a:pPr>
+            <a:r>
+              <a:rPr lang="en-US" altLang="ko-KR" sz="1400" dirty="0" err="1" smtClean="0"/>
+              <a:t>processtime</a:t>
+            </a:r>
+            <a:endParaRPr lang="en-US" altLang="ko-KR" sz="1400" dirty="0"/>
+          </a:p>
+          <a:p>
+            <a:pPr marL="742950" lvl="1" indent="-285750">
+              <a:buFont typeface="Arial" panose="020B0604020202020204" pitchFamily="34" charset="0"/>
+              <a:buChar char="•"/>
+            </a:pPr>
+            <a:r>
+              <a:rPr lang="en-US" altLang="ko-KR" sz="1400" dirty="0" smtClean="0"/>
+              <a:t>DRAFT : </a:t>
+            </a:r>
+            <a:r>
+              <a:rPr lang="ko-KR" altLang="en-US" sz="1400" dirty="0" err="1" smtClean="0"/>
+              <a:t>기안부서</a:t>
+            </a:r>
+            <a:r>
+              <a:rPr lang="ko-KR" altLang="en-US" sz="1400" dirty="0" smtClean="0"/>
+              <a:t> 문서</a:t>
+            </a:r>
+            <a:endParaRPr lang="en-US" altLang="ko-KR" sz="1400" dirty="0" smtClean="0"/>
+          </a:p>
+          <a:p>
+            <a:pPr marL="742950" lvl="1" indent="-285750">
+              <a:buFont typeface="Arial" panose="020B0604020202020204" pitchFamily="34" charset="0"/>
+              <a:buChar char="•"/>
+            </a:pPr>
+            <a:r>
+              <a:rPr lang="en-US" altLang="ko-KR" sz="1400" dirty="0" smtClean="0"/>
+              <a:t>SUSIN : </a:t>
+            </a:r>
+            <a:r>
+              <a:rPr lang="ko-KR" altLang="en-US" sz="1400" dirty="0" err="1" smtClean="0"/>
+              <a:t>수신부서</a:t>
+            </a:r>
+            <a:r>
+              <a:rPr lang="ko-KR" altLang="en-US" sz="1400" dirty="0" smtClean="0"/>
+              <a:t> 문서</a:t>
+            </a:r>
+            <a:endParaRPr lang="en-US" altLang="ko-KR" sz="1400" dirty="0" smtClean="0"/>
+          </a:p>
+          <a:p>
+            <a:pPr marL="742950" lvl="1" indent="-285750">
+              <a:buFont typeface="Arial" panose="020B0604020202020204" pitchFamily="34" charset="0"/>
+              <a:buChar char="•"/>
+            </a:pPr>
+            <a:r>
+              <a:rPr lang="en-US" altLang="ko-KR" sz="1400" dirty="0" smtClean="0"/>
+              <a:t>HAPYUI : </a:t>
+            </a:r>
+            <a:r>
+              <a:rPr lang="ko-KR" altLang="en-US" sz="1400" dirty="0" err="1" smtClean="0"/>
+              <a:t>부서합의</a:t>
+            </a:r>
+            <a:r>
+              <a:rPr lang="ko-KR" altLang="en-US" sz="1400" dirty="0" smtClean="0"/>
+              <a:t> 문서</a:t>
+            </a:r>
+            <a:endParaRPr lang="en-US" altLang="ko-KR" sz="1400" dirty="0" smtClean="0"/>
+          </a:p>
+          <a:p>
+            <a:pPr marL="742950" lvl="1" indent="-285750">
+              <a:buFont typeface="Arial" panose="020B0604020202020204" pitchFamily="34" charset="0"/>
+              <a:buChar char="•"/>
+            </a:pPr>
+            <a:r>
+              <a:rPr lang="en-US" altLang="ko-KR" sz="1400" dirty="0" smtClean="0"/>
+              <a:t>CHAMJO : </a:t>
+            </a:r>
+            <a:r>
+              <a:rPr lang="ko-KR" altLang="en-US" sz="1400" dirty="0" smtClean="0"/>
+              <a:t>참조 문서 </a:t>
+            </a:r>
+            <a:r>
+              <a:rPr lang="en-US" altLang="ko-KR" sz="1400" dirty="0" smtClean="0"/>
+              <a:t>(</a:t>
+            </a:r>
+            <a:r>
+              <a:rPr lang="ko-KR" altLang="en-US" sz="1400" dirty="0" smtClean="0"/>
+              <a:t>결재선상에서 본인이 참조인 경우</a:t>
+            </a:r>
+            <a:r>
+              <a:rPr lang="en-US" altLang="ko-KR" sz="1400" dirty="0" smtClean="0"/>
+              <a:t>)</a:t>
+            </a:r>
+            <a:endParaRPr lang="en-US" altLang="ko-KR" sz="1400" dirty="0" smtClean="0"/>
           </a:p>
         </p:txBody>
       </p:sp>
@@ -12730,7 +13492,7 @@
         </p:nvSpPr>
         <p:spPr>
           <a:xfrm>
-            <a:off x="557213" y="1910086"/>
+            <a:off x="557213" y="4377098"/>
             <a:ext cx="2918684" cy="400110"/>
           </a:xfrm>
           <a:prstGeom prst="rect">
@@ -12776,7 +13538,7 @@
         </p:nvSpPr>
         <p:spPr>
           <a:xfrm>
-            <a:off x="557214" y="2454300"/>
+            <a:off x="557214" y="4921312"/>
             <a:ext cx="11006136" cy="1600438"/>
           </a:xfrm>
           <a:prstGeom prst="rect">
@@ -13018,195 +13780,6 @@
             <a:r>
               <a:rPr lang="en-US" altLang="ko-KR" sz="1400" dirty="0" smtClean="0"/>
               <a:t>=“UA_EX”/&gt;</a:t>
-            </a:r>
-          </a:p>
-        </p:txBody>
-      </p:sp>
-      <p:sp>
-        <p:nvSpPr>
-          <p:cNvPr id="13" name="TextBox 12"/>
-          <p:cNvSpPr txBox="1"/>
-          <p:nvPr/>
-        </p:nvSpPr>
-        <p:spPr>
-          <a:xfrm>
-            <a:off x="557213" y="4424686"/>
-            <a:ext cx="2261966" cy="400110"/>
-          </a:xfrm>
-          <a:prstGeom prst="rect">
-            <a:avLst/>
-          </a:prstGeom>
-          <a:noFill/>
-        </p:spPr>
-        <p:txBody>
-          <a:bodyPr wrap="none" rtlCol="0">
-            <a:spAutoFit/>
-          </a:bodyPr>
-          <a:lstStyle/>
-          <a:p>
-            <a:r>
-              <a:rPr lang="ko-KR" altLang="en-US" sz="2000" b="1" dirty="0" smtClean="0">
-                <a:latin typeface="+mj-lt"/>
-              </a:rPr>
-              <a:t>연동</a:t>
-            </a:r>
-            <a:r>
-              <a:rPr lang="en-US" altLang="ko-KR" sz="2000" b="1" dirty="0" smtClean="0">
-                <a:latin typeface="+mj-lt"/>
-              </a:rPr>
-              <a:t>XML - query</a:t>
-            </a:r>
-            <a:endParaRPr lang="ko-KR" altLang="en-US" sz="2000" b="1" dirty="0">
-              <a:latin typeface="+mj-lt"/>
-            </a:endParaRPr>
-          </a:p>
-        </p:txBody>
-      </p:sp>
-      <p:sp>
-        <p:nvSpPr>
-          <p:cNvPr id="14" name="TextBox 13"/>
-          <p:cNvSpPr txBox="1"/>
-          <p:nvPr/>
-        </p:nvSpPr>
-        <p:spPr>
-          <a:xfrm>
-            <a:off x="557214" y="4968900"/>
-            <a:ext cx="11006136" cy="738664"/>
-          </a:xfrm>
-          <a:prstGeom prst="rect">
-            <a:avLst/>
-          </a:prstGeom>
-          <a:noFill/>
-        </p:spPr>
-        <p:txBody>
-          <a:bodyPr wrap="square" rtlCol="0">
-            <a:spAutoFit/>
-          </a:bodyPr>
-          <a:lstStyle/>
-          <a:p>
-            <a:pPr marL="285750" indent="-285750">
-              <a:buFont typeface="Arial" panose="020B0604020202020204" pitchFamily="34" charset="0"/>
-              <a:buChar char="•"/>
-            </a:pPr>
-            <a:r>
-              <a:rPr lang="en-US" altLang="ko-KR" sz="1400" dirty="0" smtClean="0"/>
-              <a:t>query</a:t>
-            </a:r>
-            <a:r>
-              <a:rPr lang="ko-KR" altLang="en-US" sz="1400" dirty="0" smtClean="0"/>
-              <a:t>노드의 </a:t>
-            </a:r>
-            <a:r>
-              <a:rPr lang="en-US" altLang="ko-KR" sz="1400" dirty="0" err="1" smtClean="0"/>
-              <a:t>qtype</a:t>
-            </a:r>
-            <a:r>
-              <a:rPr lang="ko-KR" altLang="en-US" sz="1400" dirty="0" smtClean="0"/>
-              <a:t>속성은 </a:t>
-            </a:r>
-            <a:r>
-              <a:rPr lang="en-US" altLang="ko-KR" sz="1400" dirty="0" err="1" smtClean="0"/>
-              <a:t>connstring</a:t>
-            </a:r>
-            <a:r>
-              <a:rPr lang="ko-KR" altLang="en-US" sz="1400" dirty="0" smtClean="0"/>
-              <a:t>노드의 </a:t>
-            </a:r>
-            <a:r>
-              <a:rPr lang="en-US" altLang="ko-KR" sz="1400" dirty="0" smtClean="0"/>
-              <a:t>flag</a:t>
-            </a:r>
-            <a:r>
-              <a:rPr lang="ko-KR" altLang="en-US" sz="1400" dirty="0" smtClean="0"/>
-              <a:t>속성과 짝을 이룬다</a:t>
-            </a:r>
-            <a:r>
-              <a:rPr lang="en-US" altLang="ko-KR" sz="1400" dirty="0" smtClean="0"/>
-              <a:t>. </a:t>
-            </a:r>
-          </a:p>
-          <a:p>
-            <a:pPr marL="285750" indent="-285750">
-              <a:buFont typeface="Arial" panose="020B0604020202020204" pitchFamily="34" charset="0"/>
-              <a:buChar char="•"/>
-            </a:pPr>
-            <a:r>
-              <a:rPr lang="ko-KR" altLang="en-US" sz="1400" dirty="0" smtClean="0"/>
-              <a:t>지정된 연동 시점에 노드텍스트에 적힌 </a:t>
-            </a:r>
-            <a:r>
-              <a:rPr lang="en-US" altLang="ko-KR" sz="1400" dirty="0" err="1" smtClean="0"/>
-              <a:t>url</a:t>
-            </a:r>
-            <a:r>
-              <a:rPr lang="ko-KR" altLang="en-US" sz="1400" dirty="0" smtClean="0"/>
-              <a:t>을 실행하며</a:t>
-            </a:r>
-            <a:r>
-              <a:rPr lang="en-US" altLang="ko-KR" sz="1400" dirty="0" smtClean="0"/>
-              <a:t>,</a:t>
-            </a:r>
-            <a:r>
-              <a:rPr lang="ko-KR" altLang="en-US" sz="1400" dirty="0" smtClean="0"/>
-              <a:t> </a:t>
-            </a:r>
-            <a:r>
-              <a:rPr lang="en-US" altLang="ko-KR" sz="1400" dirty="0" err="1" smtClean="0"/>
-              <a:t>qtype</a:t>
-            </a:r>
-            <a:r>
-              <a:rPr lang="ko-KR" altLang="en-US" sz="1400" dirty="0" smtClean="0"/>
-              <a:t>에 따라 컨트롤러만 호출할지 </a:t>
-            </a:r>
-            <a:r>
-              <a:rPr lang="ko-KR" altLang="en-US" sz="1400" dirty="0" err="1" smtClean="0"/>
-              <a:t>팝업창을</a:t>
-            </a:r>
-            <a:r>
-              <a:rPr lang="ko-KR" altLang="en-US" sz="1400" dirty="0" smtClean="0"/>
-              <a:t> 오픈할지 </a:t>
-            </a:r>
-            <a:r>
-              <a:rPr lang="ko-KR" altLang="en-US" sz="1400" dirty="0" err="1" smtClean="0"/>
-              <a:t>연동방식이</a:t>
-            </a:r>
-            <a:r>
-              <a:rPr lang="ko-KR" altLang="en-US" sz="1400" dirty="0" smtClean="0"/>
-              <a:t> 달라진다</a:t>
-            </a:r>
-            <a:r>
-              <a:rPr lang="en-US" altLang="ko-KR" sz="1400" dirty="0" smtClean="0"/>
-              <a:t>.</a:t>
-            </a:r>
-          </a:p>
-          <a:p>
-            <a:pPr marL="285750" indent="-285750">
-              <a:buFont typeface="Arial" panose="020B0604020202020204" pitchFamily="34" charset="0"/>
-              <a:buChar char="•"/>
-            </a:pPr>
-            <a:r>
-              <a:rPr lang="ko-KR" altLang="en-US" sz="1400" dirty="0" smtClean="0"/>
-              <a:t>자세한 내용은 </a:t>
-            </a:r>
-            <a:r>
-              <a:rPr lang="en-US" altLang="ko-KR" sz="1400" dirty="0" smtClean="0"/>
-              <a:t>“</a:t>
-            </a:r>
-            <a:r>
-              <a:rPr lang="ko-KR" altLang="en-US" sz="1400" dirty="0" err="1" smtClean="0"/>
-              <a:t>연동방식</a:t>
-            </a:r>
-            <a:r>
-              <a:rPr lang="en-US" altLang="ko-KR" sz="1400" dirty="0" smtClean="0"/>
-              <a:t>”</a:t>
-            </a:r>
-            <a:r>
-              <a:rPr lang="ko-KR" altLang="en-US" sz="1400" dirty="0" smtClean="0"/>
-              <a:t>을 참고한다</a:t>
-            </a:r>
-            <a:r>
-              <a:rPr lang="en-US" altLang="ko-KR" sz="1400" dirty="0" smtClean="0"/>
-              <a:t>.</a:t>
             </a:r>
           </a:p>
         </p:txBody>
@@ -13249,7 +13822,7 @@
         </p:nvSpPr>
         <p:spPr>
           <a:xfrm>
-            <a:off x="557213" y="2397370"/>
+            <a:off x="557213" y="3542727"/>
             <a:ext cx="2065758" cy="400110"/>
           </a:xfrm>
           <a:prstGeom prst="rect">
@@ -13289,7 +13862,7 @@
         </p:nvSpPr>
         <p:spPr>
           <a:xfrm>
-            <a:off x="557214" y="2941584"/>
+            <a:off x="557214" y="4086941"/>
             <a:ext cx="11006136" cy="523220"/>
           </a:xfrm>
           <a:prstGeom prst="rect">
@@ -13364,7 +13937,7 @@
         </p:nvSpPr>
         <p:spPr>
           <a:xfrm>
-            <a:off x="557213" y="3834136"/>
+            <a:off x="557213" y="4754265"/>
             <a:ext cx="1947136" cy="400110"/>
           </a:xfrm>
           <a:prstGeom prst="rect">
@@ -13404,7 +13977,7 @@
         </p:nvSpPr>
         <p:spPr>
           <a:xfrm>
-            <a:off x="557214" y="4378350"/>
+            <a:off x="557214" y="5298479"/>
             <a:ext cx="11006136" cy="738664"/>
           </a:xfrm>
           <a:prstGeom prst="rect">
@@ -13541,7 +14114,7 @@
         </p:nvSpPr>
         <p:spPr>
           <a:xfrm>
-            <a:off x="557213" y="473320"/>
+            <a:off x="557213" y="1900302"/>
             <a:ext cx="3082511" cy="400110"/>
           </a:xfrm>
           <a:prstGeom prst="rect">
@@ -13587,7 +14160,7 @@
         </p:nvSpPr>
         <p:spPr>
           <a:xfrm>
-            <a:off x="557214" y="1017534"/>
+            <a:off x="557214" y="2444516"/>
             <a:ext cx="11006136" cy="954107"/>
           </a:xfrm>
           <a:prstGeom prst="rect">
@@ -13735,6 +14308,195 @@
               <a:t>.</a:t>
             </a:r>
             <a:endParaRPr lang="en-US" altLang="ko-KR" sz="1400" dirty="0"/>
+          </a:p>
+        </p:txBody>
+      </p:sp>
+      <p:sp>
+        <p:nvSpPr>
+          <p:cNvPr id="8" name="TextBox 7"/>
+          <p:cNvSpPr txBox="1"/>
+          <p:nvPr/>
+        </p:nvSpPr>
+        <p:spPr>
+          <a:xfrm>
+            <a:off x="557213" y="473320"/>
+            <a:ext cx="2261966" cy="400110"/>
+          </a:xfrm>
+          <a:prstGeom prst="rect">
+            <a:avLst/>
+          </a:prstGeom>
+          <a:noFill/>
+        </p:spPr>
+        <p:txBody>
+          <a:bodyPr wrap="none" rtlCol="0">
+            <a:spAutoFit/>
+          </a:bodyPr>
+          <a:lstStyle/>
+          <a:p>
+            <a:r>
+              <a:rPr lang="ko-KR" altLang="en-US" sz="2000" b="1" dirty="0" smtClean="0">
+                <a:latin typeface="+mj-lt"/>
+              </a:rPr>
+              <a:t>연동</a:t>
+            </a:r>
+            <a:r>
+              <a:rPr lang="en-US" altLang="ko-KR" sz="2000" b="1" dirty="0" smtClean="0">
+                <a:latin typeface="+mj-lt"/>
+              </a:rPr>
+              <a:t>XML - query</a:t>
+            </a:r>
+            <a:endParaRPr lang="ko-KR" altLang="en-US" sz="2000" b="1" dirty="0">
+              <a:latin typeface="+mj-lt"/>
+            </a:endParaRPr>
+          </a:p>
+        </p:txBody>
+      </p:sp>
+      <p:sp>
+        <p:nvSpPr>
+          <p:cNvPr id="10" name="TextBox 9"/>
+          <p:cNvSpPr txBox="1"/>
+          <p:nvPr/>
+        </p:nvSpPr>
+        <p:spPr>
+          <a:xfrm>
+            <a:off x="557214" y="1017534"/>
+            <a:ext cx="11006136" cy="738664"/>
+          </a:xfrm>
+          <a:prstGeom prst="rect">
+            <a:avLst/>
+          </a:prstGeom>
+          <a:noFill/>
+        </p:spPr>
+        <p:txBody>
+          <a:bodyPr wrap="square" rtlCol="0">
+            <a:spAutoFit/>
+          </a:bodyPr>
+          <a:lstStyle/>
+          <a:p>
+            <a:pPr marL="285750" indent="-285750">
+              <a:buFont typeface="Arial" panose="020B0604020202020204" pitchFamily="34" charset="0"/>
+              <a:buChar char="•"/>
+            </a:pPr>
+            <a:r>
+              <a:rPr lang="en-US" altLang="ko-KR" sz="1400" dirty="0" smtClean="0"/>
+              <a:t>query</a:t>
+            </a:r>
+            <a:r>
+              <a:rPr lang="ko-KR" altLang="en-US" sz="1400" dirty="0" smtClean="0"/>
+              <a:t>노드의 </a:t>
+            </a:r>
+            <a:r>
+              <a:rPr lang="en-US" altLang="ko-KR" sz="1400" dirty="0" err="1" smtClean="0"/>
+              <a:t>qtype</a:t>
+            </a:r>
+            <a:r>
+              <a:rPr lang="ko-KR" altLang="en-US" sz="1400" dirty="0" smtClean="0"/>
+              <a:t>속성은 </a:t>
+            </a:r>
+            <a:r>
+              <a:rPr lang="en-US" altLang="ko-KR" sz="1400" dirty="0" err="1" smtClean="0"/>
+              <a:t>connstring</a:t>
+            </a:r>
+            <a:r>
+              <a:rPr lang="ko-KR" altLang="en-US" sz="1400" dirty="0" smtClean="0"/>
+              <a:t>노드의 </a:t>
+            </a:r>
+            <a:r>
+              <a:rPr lang="en-US" altLang="ko-KR" sz="1400" dirty="0" smtClean="0"/>
+              <a:t>flag</a:t>
+            </a:r>
+            <a:r>
+              <a:rPr lang="ko-KR" altLang="en-US" sz="1400" dirty="0" smtClean="0"/>
+              <a:t>속성과 짝을 이룬다</a:t>
+            </a:r>
+            <a:r>
+              <a:rPr lang="en-US" altLang="ko-KR" sz="1400" dirty="0" smtClean="0"/>
+              <a:t>. </a:t>
+            </a:r>
+          </a:p>
+          <a:p>
+            <a:pPr marL="285750" indent="-285750">
+              <a:buFont typeface="Arial" panose="020B0604020202020204" pitchFamily="34" charset="0"/>
+              <a:buChar char="•"/>
+            </a:pPr>
+            <a:r>
+              <a:rPr lang="ko-KR" altLang="en-US" sz="1400" dirty="0" smtClean="0"/>
+              <a:t>지정된 연동 시점에 노드텍스트에 적힌 </a:t>
+            </a:r>
+            <a:r>
+              <a:rPr lang="en-US" altLang="ko-KR" sz="1400" dirty="0" err="1" smtClean="0"/>
+              <a:t>url</a:t>
+            </a:r>
+            <a:r>
+              <a:rPr lang="ko-KR" altLang="en-US" sz="1400" dirty="0" smtClean="0"/>
+              <a:t>을 실행하며</a:t>
+            </a:r>
+            <a:r>
+              <a:rPr lang="en-US" altLang="ko-KR" sz="1400" dirty="0" smtClean="0"/>
+              <a:t>,</a:t>
+            </a:r>
+            <a:r>
+              <a:rPr lang="ko-KR" altLang="en-US" sz="1400" dirty="0" smtClean="0"/>
+              <a:t> </a:t>
+            </a:r>
+            <a:r>
+              <a:rPr lang="en-US" altLang="ko-KR" sz="1400" dirty="0" err="1" smtClean="0"/>
+              <a:t>qtype</a:t>
+            </a:r>
+            <a:r>
+              <a:rPr lang="ko-KR" altLang="en-US" sz="1400" dirty="0" smtClean="0"/>
+              <a:t>에 따라 컨트롤러만 호출할지 </a:t>
+            </a:r>
+            <a:r>
+              <a:rPr lang="ko-KR" altLang="en-US" sz="1400" dirty="0" err="1" smtClean="0"/>
+              <a:t>팝업창을</a:t>
+            </a:r>
+            <a:r>
+              <a:rPr lang="ko-KR" altLang="en-US" sz="1400" dirty="0" smtClean="0"/>
+              <a:t> 오픈할지 </a:t>
+            </a:r>
+            <a:r>
+              <a:rPr lang="ko-KR" altLang="en-US" sz="1400" dirty="0" err="1" smtClean="0"/>
+              <a:t>연동방식이</a:t>
+            </a:r>
+            <a:r>
+              <a:rPr lang="ko-KR" altLang="en-US" sz="1400" dirty="0" smtClean="0"/>
+              <a:t> 달라진다</a:t>
+            </a:r>
+            <a:r>
+              <a:rPr lang="en-US" altLang="ko-KR" sz="1400" dirty="0" smtClean="0"/>
+              <a:t>.</a:t>
+            </a:r>
+          </a:p>
+          <a:p>
+            <a:pPr marL="285750" indent="-285750">
+              <a:buFont typeface="Arial" panose="020B0604020202020204" pitchFamily="34" charset="0"/>
+              <a:buChar char="•"/>
+            </a:pPr>
+            <a:r>
+              <a:rPr lang="ko-KR" altLang="en-US" sz="1400" dirty="0" smtClean="0"/>
+              <a:t>자세한 내용은 </a:t>
+            </a:r>
+            <a:r>
+              <a:rPr lang="en-US" altLang="ko-KR" sz="1400" dirty="0" smtClean="0"/>
+              <a:t>“</a:t>
+            </a:r>
+            <a:r>
+              <a:rPr lang="ko-KR" altLang="en-US" sz="1400" dirty="0" err="1" smtClean="0"/>
+              <a:t>연동방식</a:t>
+            </a:r>
+            <a:r>
+              <a:rPr lang="en-US" altLang="ko-KR" sz="1400" dirty="0" smtClean="0"/>
+              <a:t>”</a:t>
+            </a:r>
+            <a:r>
+              <a:rPr lang="ko-KR" altLang="en-US" sz="1400" dirty="0" smtClean="0"/>
+              <a:t>을 참고한다</a:t>
+            </a:r>
+            <a:r>
+              <a:rPr lang="en-US" altLang="ko-KR" sz="1400" dirty="0" smtClean="0"/>
+              <a:t>.</a:t>
+            </a:r>
           </a:p>
         </p:txBody>
       </p:sp>
@@ -14502,7 +15264,6 @@
               <a:rPr lang="en-US" altLang="ko-KR" sz="1400" dirty="0" smtClean="0"/>
               <a:t>)</a:t>
             </a:r>
-            <a:endParaRPr lang="en-US" altLang="ko-KR" sz="1400" dirty="0" smtClean="0"/>
           </a:p>
         </p:txBody>
       </p:sp>
